--- a/bpmn-cmmn-dmn/niveau-2/deel-20/slidedeck.pptx
+++ b/bpmn-cmmn-dmn/niveau-2/deel-20/slidedeck.pptx
@@ -26,9 +26,10 @@
     <p:sldId id="274" r:id="rId20"/>
     <p:sldId id="275" r:id="rId21"/>
     <p:sldId id="276" r:id="rId22"/>
+    <p:sldId id="277" r:id="rId23"/>
   </p:sldIdLst>
   <p:notesMasterIdLst>
-    <p:notesMasterId r:id="rId23"/>
+    <p:notesMasterId r:id="rId24"/>
   </p:notesMasterIdLst>
   <p:sldSz cx="12192000" cy="6858000"/>
   <p:notesSz cx="6858000" cy="12192000"/>
@@ -1690,6 +1691,94 @@
             <a:fld id="{F7021451-1387-4CA6-816F-3879F97B5CBC}" type="slidenum">
               <a:rPr lang="en-US"/>
               <a:t>21</a:t>
+            </a:fld>
+            <a:endParaRPr lang="en-US"/>
+          </a:p>
+        </p:txBody>
+      </p:sp>
+    </p:spTree>
+    <p:extLst>
+      <p:ext uri="{BB962C8B-B14F-4D97-AF65-F5344CB8AC3E}">
+        <p14:creationId xmlns:p14="http://schemas.microsoft.com/office/powerpoint/2010/main" val="1024086991"/>
+      </p:ext>
+    </p:extLst>
+  </p:cSld>
+  <p:clrMapOvr>
+    <a:masterClrMapping/>
+  </p:clrMapOvr>
+</p:notes>
+</file>
+
+<file path=ppt/notesSlides/notesSlide22.xml><?xml version="1.0" encoding="utf-8"?>
+<p:notes xmlns:a="http://schemas.openxmlformats.org/drawingml/2006/main" xmlns:r="http://schemas.openxmlformats.org/officeDocument/2006/relationships" xmlns:p="http://schemas.openxmlformats.org/presentationml/2006/main">
+  <p:cSld>
+    <p:spTree>
+      <p:nvGrpSpPr>
+        <p:cNvPr id="1" name=""/>
+        <p:cNvGrpSpPr/>
+        <p:nvPr/>
+      </p:nvGrpSpPr>
+      <p:grpSpPr>
+        <a:xfrm>
+          <a:off x="0" y="0"/>
+          <a:ext cx="0" cy="0"/>
+          <a:chOff x="0" y="0"/>
+          <a:chExt cx="0" cy="0"/>
+        </a:xfrm>
+      </p:grpSpPr>
+      <p:sp>
+        <p:nvSpPr>
+          <p:cNvPr id="2" name="Slide Image Placeholder 1"/>
+          <p:cNvSpPr>
+            <a:spLocks noGrp="1" noRot="1" noChangeAspect="1"/>
+          </p:cNvSpPr>
+          <p:nvPr>
+            <p:ph type="sldImg"/>
+          </p:nvPr>
+        </p:nvSpPr>
+        <p:spPr/>
+      </p:sp>
+      <p:sp>
+        <p:nvSpPr>
+          <p:cNvPr id="3" name="Notes Placeholder 2"/>
+          <p:cNvSpPr>
+            <a:spLocks noGrp="1"/>
+          </p:cNvSpPr>
+          <p:nvPr>
+            <p:ph type="body" idx="1"/>
+          </p:nvPr>
+        </p:nvSpPr>
+        <p:spPr/>
+        <p:txBody>
+          <a:bodyPr/>
+          <a:lstStyle/>
+          <a:p>
+            <a:r>
+              <a:rPr lang="en-US" dirty="0"/>
+              <a:t/>
+            </a:r>
+            <a:endParaRPr lang="en-US" dirty="0"/>
+          </a:p>
+        </p:txBody>
+      </p:sp>
+      <p:sp>
+        <p:nvSpPr>
+          <p:cNvPr id="4" name="Slide Number Placeholder 3"/>
+          <p:cNvSpPr>
+            <a:spLocks noGrp="1"/>
+          </p:cNvSpPr>
+          <p:nvPr>
+            <p:ph type="sldNum" sz="quarter" idx="10"/>
+          </p:nvPr>
+        </p:nvSpPr>
+        <p:spPr/>
+        <p:txBody>
+          <a:bodyPr/>
+          <a:lstStyle/>
+          <a:p>
+            <a:fld id="{F7021451-1387-4CA6-816F-3879F97B5CBC}" type="slidenum">
+              <a:rPr lang="en-US"/>
+              <a:t>22</a:t>
             </a:fld>
             <a:endParaRPr lang="en-US"/>
           </a:p>
@@ -2876,7 +2965,7 @@
                 <a:ea typeface="Calibri" pitchFamily="34" charset="-122"/>
                 <a:cs typeface="Calibri" pitchFamily="34" charset="-120"/>
               </a:rPr>
-              <a:t>Ontbrekende stappen · toegevoegde stappen · afwijkende volgorde</a:t>
+              <a:t>Conformance checking</a:t>
             </a:r>
             <a:endParaRPr lang="en-US" sz="2400" dirty="0"/>
           </a:p>
@@ -2939,7 +3028,7 @@
                 <a:ea typeface="Calibri" pitchFamily="34" charset="-122"/>
                 <a:cs typeface="Calibri" pitchFamily="34" charset="-120"/>
               </a:rPr>
-              <a:t>ingevuld</a:t>
+              <a:t>leeg</a:t>
             </a:r>
             <a:endParaRPr lang="en-US" sz="1200" dirty="0"/>
           </a:p>
@@ -2998,7 +3087,7 @@
                 <a:ea typeface="Calibri" pitchFamily="34" charset="-122"/>
                 <a:cs typeface="Calibri" pitchFamily="34" charset="-120"/>
               </a:rPr>
-              <a:t>Spreeknotitie: Een score, geen absoluut oordeel.</a:t>
+              <a:t>Spreeknotitie: Introductie.</a:t>
             </a:r>
             <a:endParaRPr lang="en-US" sz="1050" dirty="0"/>
           </a:p>
@@ -3069,140 +3158,98 @@
                 <a:ea typeface="Calibri" pitchFamily="34" charset="-122"/>
                 <a:cs typeface="Calibri" pitchFamily="34" charset="-120"/>
               </a:rPr>
-              <a:t>Clusteren op frequentie</a:t>
+              <a:t>Ontbrekende stappen · toegevoegde stappen · afwijkende volgorde</a:t>
             </a:r>
             <a:endParaRPr lang="en-US" sz="2400" dirty="0"/>
           </a:p>
         </p:txBody>
       </p:sp>
-      <p:sp>
-        <p:nvSpPr>
-          <p:cNvPr id="3" name="Shape 1"/>
-          <p:cNvSpPr/>
-          <p:nvPr/>
-        </p:nvSpPr>
-        <p:spPr>
-          <a:xfrm>
-            <a:off x="822960" y="1371600"/>
-            <a:ext cx="10515600" cy="4206240"/>
-          </a:xfrm>
-          <a:prstGeom prst="roundRect">
-            <a:avLst>
-              <a:gd name="adj" fmla="val 1304"/>
-            </a:avLst>
+      <p:pic>
+        <p:nvPicPr>
+          <p:cNvPr id="3" name="Image 0" descr="C:\Projecten\eductus-trainingen\CMMN_BPMN_DMN\cursus-bpmn-cmmn-dmn\build\png\deel-20\figuur-20-4-conformance-uitkomst.png">    </p:cNvPr>
+          <p:cNvPicPr>
+            <a:picLocks noChangeAspect="1"/>
+          </p:cNvPicPr>
+          <p:nvPr/>
+        </p:nvPicPr>
+        <p:blipFill>
+          <a:blip r:embed="rId1"/>
+          <a:stretch>
+            <a:fillRect/>
+          </a:stretch>
+        </p:blipFill>
+        <p:spPr>
+          <a:xfrm>
+            <a:off x="2566244" y="1234440"/>
+            <a:ext cx="7056463" cy="4114800"/>
+          </a:xfrm>
+          <a:prstGeom prst="rect">
+            <a:avLst/>
+          </a:prstGeom>
+        </p:spPr>
+      </p:pic>
+      <p:sp>
+        <p:nvSpPr>
+          <p:cNvPr id="4" name="Text 1"/>
+          <p:cNvSpPr/>
+          <p:nvPr/>
+        </p:nvSpPr>
+        <p:spPr>
+          <a:xfrm>
+            <a:off x="731520" y="5440680"/>
+            <a:ext cx="10698480" cy="457200"/>
+          </a:xfrm>
+          <a:prstGeom prst="rect">
+            <a:avLst/>
+          </a:prstGeom>
+          <a:noFill/>
+          <a:ln/>
+        </p:spPr>
+        <p:txBody>
+          <a:bodyPr wrap="square" rtlCol="0" anchor="ctr"/>
+          <a:lstStyle/>
+          <a:p>
+            <a:pPr algn="ctr" indent="0" marL="0">
+              <a:buNone/>
+            </a:pPr>
+            <a:r>
+              <a:rPr lang="en-US" sz="1200" i="1" dirty="0">
+                <a:solidFill>
+                  <a:srgbClr val="6B7280"/>
+                </a:solidFill>
+                <a:latin typeface="Calibri" pitchFamily="34" charset="0"/>
+                <a:ea typeface="Calibri" pitchFamily="34" charset="-122"/>
+                <a:cs typeface="Calibri" pitchFamily="34" charset="-120"/>
+              </a:rPr>
+              <a:t>ingevuld</a:t>
+            </a:r>
+            <a:endParaRPr lang="en-US" sz="1200" dirty="0"/>
+          </a:p>
+        </p:txBody>
+      </p:sp>
+      <p:sp>
+        <p:nvSpPr>
+          <p:cNvPr id="5" name="Shape 2"/>
+          <p:cNvSpPr/>
+          <p:nvPr/>
+        </p:nvSpPr>
+        <p:spPr>
+          <a:xfrm>
+            <a:off x="0" y="6172200"/>
+            <a:ext cx="12188952" cy="685800"/>
+          </a:xfrm>
+          <a:prstGeom prst="rect">
+            <a:avLst/>
           </a:prstGeom>
           <a:solidFill>
             <a:srgbClr val="EEF1F6"/>
           </a:solidFill>
-          <a:ln w="12700">
-            <a:solidFill>
-              <a:srgbClr val="D7DCE5"/>
-            </a:solidFill>
-            <a:prstDash val="solid"/>
-          </a:ln>
-        </p:spPr>
-      </p:sp>
-      <p:sp>
-        <p:nvSpPr>
-          <p:cNvPr id="4" name="Text 2"/>
-          <p:cNvSpPr/>
-          <p:nvPr/>
-        </p:nvSpPr>
-        <p:spPr>
-          <a:xfrm>
-            <a:off x="1188720" y="1645920"/>
-            <a:ext cx="2743200" cy="365760"/>
-          </a:xfrm>
-          <a:prstGeom prst="rect">
-            <a:avLst/>
-          </a:prstGeom>
-          <a:noFill/>
-          <a:ln/>
-        </p:spPr>
-        <p:txBody>
-          <a:bodyPr wrap="square" rtlCol="0" anchor="ctr"/>
-          <a:lstStyle/>
-          <a:p>
-            <a:pPr indent="0" marL="0">
-              <a:buNone/>
-            </a:pPr>
-            <a:r>
-              <a:rPr lang="en-US" sz="1200" b="1" spc="200" kern="0" dirty="0">
-                <a:solidFill>
-                  <a:srgbClr val="E9A13B"/>
-                </a:solidFill>
-                <a:latin typeface="Calibri" pitchFamily="34" charset="0"/>
-                <a:ea typeface="Calibri" pitchFamily="34" charset="-122"/>
-                <a:cs typeface="Calibri" pitchFamily="34" charset="-120"/>
-              </a:rPr>
-              <a:t>BEELD</a:t>
-            </a:r>
-            <a:endParaRPr lang="en-US" sz="1200" dirty="0"/>
-          </a:p>
-        </p:txBody>
-      </p:sp>
-      <p:sp>
-        <p:nvSpPr>
-          <p:cNvPr id="5" name="Text 3"/>
-          <p:cNvSpPr/>
-          <p:nvPr/>
-        </p:nvSpPr>
-        <p:spPr>
-          <a:xfrm>
-            <a:off x="1188720" y="2103120"/>
-            <a:ext cx="9784080" cy="3200400"/>
-          </a:xfrm>
-          <a:prstGeom prst="rect">
-            <a:avLst/>
-          </a:prstGeom>
-          <a:noFill/>
-          <a:ln/>
-        </p:spPr>
-        <p:txBody>
-          <a:bodyPr wrap="square" rtlCol="0" anchor="t"/>
-          <a:lstStyle/>
-          <a:p>
-            <a:pPr indent="0" marL="0">
-              <a:buNone/>
-            </a:pPr>
-            <a:r>
-              <a:rPr lang="en-US" sz="1800" i="1" dirty="0">
-                <a:solidFill>
-                  <a:srgbClr val="14213D"/>
-                </a:solidFill>
-                <a:latin typeface="Calibri" pitchFamily="34" charset="0"/>
-                <a:ea typeface="Calibri" pitchFamily="34" charset="-122"/>
-                <a:cs typeface="Calibri" pitchFamily="34" charset="-120"/>
-              </a:rPr>
-              <a:t>Honderd losse afwijkingen versus drie patronen</a:t>
-            </a:r>
-            <a:endParaRPr lang="en-US" sz="1800" dirty="0"/>
-          </a:p>
-        </p:txBody>
-      </p:sp>
-      <p:sp>
-        <p:nvSpPr>
-          <p:cNvPr id="6" name="Shape 4"/>
-          <p:cNvSpPr/>
-          <p:nvPr/>
-        </p:nvSpPr>
-        <p:spPr>
-          <a:xfrm>
-            <a:off x="0" y="6172200"/>
-            <a:ext cx="12188952" cy="685800"/>
-          </a:xfrm>
-          <a:prstGeom prst="rect">
-            <a:avLst/>
-          </a:prstGeom>
-          <a:solidFill>
-            <a:srgbClr val="EEF1F6"/>
-          </a:solidFill>
-          <a:ln/>
-        </p:spPr>
-      </p:sp>
-      <p:sp>
-        <p:nvSpPr>
-          <p:cNvPr id="7" name="Text 5"/>
+          <a:ln/>
+        </p:spPr>
+      </p:sp>
+      <p:sp>
+        <p:nvSpPr>
+          <p:cNvPr id="6" name="Text 3"/>
           <p:cNvSpPr/>
           <p:nvPr/>
         </p:nvSpPr>
@@ -3233,7 +3280,7 @@
                 <a:ea typeface="Calibri" pitchFamily="34" charset="-122"/>
                 <a:cs typeface="Calibri" pitchFamily="34" charset="-120"/>
               </a:rPr>
-              <a:t>Spreeknotitie: De vaardigheid zit in het patroon zien, niet in elk geval apart bekijken.</a:t>
+              <a:t>Spreeknotitie: Een score, geen absoluut oordeel.</a:t>
             </a:r>
             <a:endParaRPr lang="en-US" sz="1050" dirty="0"/>
           </a:p>
@@ -3304,7 +3351,7 @@
                 <a:ea typeface="Calibri" pitchFamily="34" charset="-122"/>
                 <a:cs typeface="Calibri" pitchFamily="34" charset="-120"/>
               </a:rPr>
-              <a:t>Eerste conformance-run — Deelnemermutaties</a:t>
+              <a:t>Clusteren op frequentie</a:t>
             </a:r>
             <a:endParaRPr lang="en-US" sz="2400" dirty="0"/>
           </a:p>
@@ -3409,7 +3456,7 @@
                 <a:ea typeface="Calibri" pitchFamily="34" charset="-122"/>
                 <a:cs typeface="Calibri" pitchFamily="34" charset="-120"/>
               </a:rPr>
-              <a:t>Werkboekverwijzing, timer 30 minuten</a:t>
+              <a:t>Honderd losse afwijkingen versus drie patronen</a:t>
             </a:r>
             <a:endParaRPr lang="en-US" sz="1800" dirty="0"/>
           </a:p>
@@ -3468,7 +3515,7 @@
                 <a:ea typeface="Calibri" pitchFamily="34" charset="-122"/>
                 <a:cs typeface="Calibri" pitchFamily="34" charset="-120"/>
               </a:rPr>
-              <a:t>Spreeknotitie: Individueel in Retroductus.</a:t>
+              <a:t>Spreeknotitie: De vaardigheid zit in het patroon zien, niet in elk geval apart bekijken.</a:t>
             </a:r>
             <a:endParaRPr lang="en-US" sz="1050" dirty="0"/>
           </a:p>
@@ -3539,7 +3586,7 @@
                 <a:ea typeface="Calibri" pitchFamily="34" charset="-122"/>
                 <a:cs typeface="Calibri" pitchFamily="34" charset="-120"/>
               </a:rPr>
-              <a:t>Jouw eigen to-be model tegen de werkelijkheid</a:t>
+              <a:t>Eerste conformance-run — Deelnemermutaties</a:t>
             </a:r>
             <a:endParaRPr lang="en-US" sz="2400" dirty="0"/>
           </a:p>
@@ -3644,7 +3691,7 @@
                 <a:ea typeface="Calibri" pitchFamily="34" charset="-122"/>
                 <a:cs typeface="Calibri" pitchFamily="34" charset="-120"/>
               </a:rPr>
-              <a:t>Werkboekverwijzing, timer 20 minuten</a:t>
+              <a:t>Werkboekverwijzing, timer 30 minuten</a:t>
             </a:r>
             <a:endParaRPr lang="en-US" sz="1800" dirty="0"/>
           </a:p>
@@ -3703,7 +3750,7 @@
                 <a:ea typeface="Calibri" pitchFamily="34" charset="-122"/>
                 <a:cs typeface="Calibri" pitchFamily="34" charset="-120"/>
               </a:rPr>
-              <a:t>Spreeknotitie: Individueel. Waarschuw vooraf: een lage score is de bedoeling van deze opdracht, geen falen.</a:t>
+              <a:t>Spreeknotitie: Individueel in Retroductus.</a:t>
             </a:r>
             <a:endParaRPr lang="en-US" sz="1050" dirty="0"/>
           </a:p>
@@ -3774,98 +3821,140 @@
                 <a:ea typeface="Calibri" pitchFamily="34" charset="-122"/>
                 <a:cs typeface="Calibri" pitchFamily="34" charset="-120"/>
               </a:rPr>
-              <a:t>Het model — de uitvoering — of geen van beide</a:t>
+              <a:t>Jouw eigen to-be model tegen de werkelijkheid</a:t>
             </a:r>
             <a:endParaRPr lang="en-US" sz="2400" dirty="0"/>
           </a:p>
         </p:txBody>
       </p:sp>
-      <p:pic>
-        <p:nvPicPr>
-          <p:cNvPr id="3" name="Image 0" descr="C:\Projecten\eductus-trainingen\CMMN_BPMN_DMN\cursus-bpmn-cmmn-dmn\build\png\deel-20\figuur-20-5-wie-heeft-gelijk-beslisboom.png">    </p:cNvPr>
-          <p:cNvPicPr>
-            <a:picLocks noChangeAspect="1"/>
-          </p:cNvPicPr>
-          <p:nvPr/>
-        </p:nvPicPr>
-        <p:blipFill>
-          <a:blip r:embed="rId1"/>
-          <a:stretch>
-            <a:fillRect/>
-          </a:stretch>
-        </p:blipFill>
-        <p:spPr>
-          <a:xfrm>
-            <a:off x="2379081" y="1234440"/>
-            <a:ext cx="7430790" cy="4114800"/>
-          </a:xfrm>
-          <a:prstGeom prst="rect">
-            <a:avLst/>
-          </a:prstGeom>
-        </p:spPr>
-      </p:pic>
-      <p:sp>
-        <p:nvSpPr>
-          <p:cNvPr id="4" name="Text 1"/>
-          <p:cNvSpPr/>
-          <p:nvPr/>
-        </p:nvSpPr>
-        <p:spPr>
-          <a:xfrm>
-            <a:off x="731520" y="5440680"/>
-            <a:ext cx="10698480" cy="457200"/>
-          </a:xfrm>
-          <a:prstGeom prst="rect">
-            <a:avLst/>
-          </a:prstGeom>
-          <a:noFill/>
-          <a:ln/>
-        </p:spPr>
-        <p:txBody>
-          <a:bodyPr wrap="square" rtlCol="0" anchor="ctr"/>
-          <a:lstStyle/>
-          <a:p>
-            <a:pPr algn="ctr" indent="0" marL="0">
-              <a:buNone/>
-            </a:pPr>
-            <a:r>
-              <a:rPr lang="en-US" sz="1200" i="1" dirty="0">
-                <a:solidFill>
-                  <a:srgbClr val="6B7280"/>
-                </a:solidFill>
-                <a:latin typeface="Calibri" pitchFamily="34" charset="0"/>
-                <a:ea typeface="Calibri" pitchFamily="34" charset="-122"/>
-                <a:cs typeface="Calibri" pitchFamily="34" charset="-120"/>
-              </a:rPr>
-              <a:t>leeg</a:t>
-            </a:r>
-            <a:endParaRPr lang="en-US" sz="1200" dirty="0"/>
-          </a:p>
-        </p:txBody>
-      </p:sp>
-      <p:sp>
-        <p:nvSpPr>
-          <p:cNvPr id="5" name="Shape 2"/>
-          <p:cNvSpPr/>
-          <p:nvPr/>
-        </p:nvSpPr>
-        <p:spPr>
-          <a:xfrm>
-            <a:off x="0" y="6172200"/>
-            <a:ext cx="12188952" cy="685800"/>
-          </a:xfrm>
-          <a:prstGeom prst="rect">
-            <a:avLst/>
+      <p:sp>
+        <p:nvSpPr>
+          <p:cNvPr id="3" name="Shape 1"/>
+          <p:cNvSpPr/>
+          <p:nvPr/>
+        </p:nvSpPr>
+        <p:spPr>
+          <a:xfrm>
+            <a:off x="822960" y="1371600"/>
+            <a:ext cx="10515600" cy="4206240"/>
+          </a:xfrm>
+          <a:prstGeom prst="roundRect">
+            <a:avLst>
+              <a:gd name="adj" fmla="val 1304"/>
+            </a:avLst>
           </a:prstGeom>
           <a:solidFill>
             <a:srgbClr val="EEF1F6"/>
           </a:solidFill>
-          <a:ln/>
-        </p:spPr>
-      </p:sp>
-      <p:sp>
-        <p:nvSpPr>
-          <p:cNvPr id="6" name="Text 3"/>
+          <a:ln w="12700">
+            <a:solidFill>
+              <a:srgbClr val="D7DCE5"/>
+            </a:solidFill>
+            <a:prstDash val="solid"/>
+          </a:ln>
+        </p:spPr>
+      </p:sp>
+      <p:sp>
+        <p:nvSpPr>
+          <p:cNvPr id="4" name="Text 2"/>
+          <p:cNvSpPr/>
+          <p:nvPr/>
+        </p:nvSpPr>
+        <p:spPr>
+          <a:xfrm>
+            <a:off x="1188720" y="1645920"/>
+            <a:ext cx="2743200" cy="365760"/>
+          </a:xfrm>
+          <a:prstGeom prst="rect">
+            <a:avLst/>
+          </a:prstGeom>
+          <a:noFill/>
+          <a:ln/>
+        </p:spPr>
+        <p:txBody>
+          <a:bodyPr wrap="square" rtlCol="0" anchor="ctr"/>
+          <a:lstStyle/>
+          <a:p>
+            <a:pPr indent="0" marL="0">
+              <a:buNone/>
+            </a:pPr>
+            <a:r>
+              <a:rPr lang="en-US" sz="1200" b="1" spc="200" kern="0" dirty="0">
+                <a:solidFill>
+                  <a:srgbClr val="E9A13B"/>
+                </a:solidFill>
+                <a:latin typeface="Calibri" pitchFamily="34" charset="0"/>
+                <a:ea typeface="Calibri" pitchFamily="34" charset="-122"/>
+                <a:cs typeface="Calibri" pitchFamily="34" charset="-120"/>
+              </a:rPr>
+              <a:t>BEELD</a:t>
+            </a:r>
+            <a:endParaRPr lang="en-US" sz="1200" dirty="0"/>
+          </a:p>
+        </p:txBody>
+      </p:sp>
+      <p:sp>
+        <p:nvSpPr>
+          <p:cNvPr id="5" name="Text 3"/>
+          <p:cNvSpPr/>
+          <p:nvPr/>
+        </p:nvSpPr>
+        <p:spPr>
+          <a:xfrm>
+            <a:off x="1188720" y="2103120"/>
+            <a:ext cx="9784080" cy="3200400"/>
+          </a:xfrm>
+          <a:prstGeom prst="rect">
+            <a:avLst/>
+          </a:prstGeom>
+          <a:noFill/>
+          <a:ln/>
+        </p:spPr>
+        <p:txBody>
+          <a:bodyPr wrap="square" rtlCol="0" anchor="t"/>
+          <a:lstStyle/>
+          <a:p>
+            <a:pPr indent="0" marL="0">
+              <a:buNone/>
+            </a:pPr>
+            <a:r>
+              <a:rPr lang="en-US" sz="1800" i="1" dirty="0">
+                <a:solidFill>
+                  <a:srgbClr val="14213D"/>
+                </a:solidFill>
+                <a:latin typeface="Calibri" pitchFamily="34" charset="0"/>
+                <a:ea typeface="Calibri" pitchFamily="34" charset="-122"/>
+                <a:cs typeface="Calibri" pitchFamily="34" charset="-120"/>
+              </a:rPr>
+              <a:t>Werkboekverwijzing, timer 20 minuten</a:t>
+            </a:r>
+            <a:endParaRPr lang="en-US" sz="1800" dirty="0"/>
+          </a:p>
+        </p:txBody>
+      </p:sp>
+      <p:sp>
+        <p:nvSpPr>
+          <p:cNvPr id="6" name="Shape 4"/>
+          <p:cNvSpPr/>
+          <p:nvPr/>
+        </p:nvSpPr>
+        <p:spPr>
+          <a:xfrm>
+            <a:off x="0" y="6172200"/>
+            <a:ext cx="12188952" cy="685800"/>
+          </a:xfrm>
+          <a:prstGeom prst="rect">
+            <a:avLst/>
+          </a:prstGeom>
+          <a:solidFill>
+            <a:srgbClr val="EEF1F6"/>
+          </a:solidFill>
+          <a:ln/>
+        </p:spPr>
+      </p:sp>
+      <p:sp>
+        <p:nvSpPr>
+          <p:cNvPr id="7" name="Text 5"/>
           <p:cNvSpPr/>
           <p:nvPr/>
         </p:nvSpPr>
@@ -3896,7 +3985,7 @@
                 <a:ea typeface="Calibri" pitchFamily="34" charset="-122"/>
                 <a:cs typeface="Calibri" pitchFamily="34" charset="-120"/>
               </a:rPr>
-              <a:t>Spreeknotitie: Drie mogelijke verklaringen voor elke afwijking.</a:t>
+              <a:t>Spreeknotitie: Individueel. Waarschuw vooraf: een lage score is de bedoeling van deze opdracht, geen falen.</a:t>
             </a:r>
             <a:endParaRPr lang="en-US" sz="1050" dirty="0"/>
           </a:p>
@@ -3967,7 +4056,7 @@
                 <a:ea typeface="Calibri" pitchFamily="34" charset="-122"/>
                 <a:cs typeface="Calibri" pitchFamily="34" charset="-120"/>
               </a:rPr>
-              <a:t>Een legitieme, nooit vastgelegde variant</a:t>
+              <a:t>Het model — de uitvoering — of geen van beide</a:t>
             </a:r>
             <a:endParaRPr lang="en-US" sz="2400" dirty="0"/>
           </a:p>
@@ -4030,7 +4119,7 @@
                 <a:ea typeface="Calibri" pitchFamily="34" charset="-122"/>
                 <a:cs typeface="Calibri" pitchFamily="34" charset="-120"/>
               </a:rPr>
-              <a:t>derde tak uitgelicht</a:t>
+              <a:t>leeg</a:t>
             </a:r>
             <a:endParaRPr lang="en-US" sz="1200" dirty="0"/>
           </a:p>
@@ -4089,7 +4178,7 @@
                 <a:ea typeface="Calibri" pitchFamily="34" charset="-122"/>
                 <a:cs typeface="Calibri" pitchFamily="34" charset="-120"/>
               </a:rPr>
-              <a:t>Spreeknotitie: Niet fout, niet verouderd — gewoon nooit opgeschreven.</a:t>
+              <a:t>Spreeknotitie: Drie mogelijke verklaringen voor elke afwijking.</a:t>
             </a:r>
             <a:endParaRPr lang="en-US" sz="1050" dirty="0"/>
           </a:p>
@@ -4160,140 +4249,98 @@
                 <a:ea typeface="Calibri" pitchFamily="34" charset="-122"/>
                 <a:cs typeface="Calibri" pitchFamily="34" charset="-120"/>
               </a:rPr>
-              <a:t>Classificeer vijf afwijkingen</a:t>
+              <a:t>Een legitieme, nooit vastgelegde variant</a:t>
             </a:r>
             <a:endParaRPr lang="en-US" sz="2400" dirty="0"/>
           </a:p>
         </p:txBody>
       </p:sp>
-      <p:sp>
-        <p:nvSpPr>
-          <p:cNvPr id="3" name="Shape 1"/>
-          <p:cNvSpPr/>
-          <p:nvPr/>
-        </p:nvSpPr>
-        <p:spPr>
-          <a:xfrm>
-            <a:off x="822960" y="1371600"/>
-            <a:ext cx="10515600" cy="4206240"/>
-          </a:xfrm>
-          <a:prstGeom prst="roundRect">
-            <a:avLst>
-              <a:gd name="adj" fmla="val 1304"/>
-            </a:avLst>
+      <p:pic>
+        <p:nvPicPr>
+          <p:cNvPr id="3" name="Image 0" descr="C:\Projecten\eductus-trainingen\CMMN_BPMN_DMN\cursus-bpmn-cmmn-dmn\build\png\deel-20\figuur-20-5-wie-heeft-gelijk-beslisboom.png">    </p:cNvPr>
+          <p:cNvPicPr>
+            <a:picLocks noChangeAspect="1"/>
+          </p:cNvPicPr>
+          <p:nvPr/>
+        </p:nvPicPr>
+        <p:blipFill>
+          <a:blip r:embed="rId1"/>
+          <a:stretch>
+            <a:fillRect/>
+          </a:stretch>
+        </p:blipFill>
+        <p:spPr>
+          <a:xfrm>
+            <a:off x="2379081" y="1234440"/>
+            <a:ext cx="7430790" cy="4114800"/>
+          </a:xfrm>
+          <a:prstGeom prst="rect">
+            <a:avLst/>
+          </a:prstGeom>
+        </p:spPr>
+      </p:pic>
+      <p:sp>
+        <p:nvSpPr>
+          <p:cNvPr id="4" name="Text 1"/>
+          <p:cNvSpPr/>
+          <p:nvPr/>
+        </p:nvSpPr>
+        <p:spPr>
+          <a:xfrm>
+            <a:off x="731520" y="5440680"/>
+            <a:ext cx="10698480" cy="457200"/>
+          </a:xfrm>
+          <a:prstGeom prst="rect">
+            <a:avLst/>
+          </a:prstGeom>
+          <a:noFill/>
+          <a:ln/>
+        </p:spPr>
+        <p:txBody>
+          <a:bodyPr wrap="square" rtlCol="0" anchor="ctr"/>
+          <a:lstStyle/>
+          <a:p>
+            <a:pPr algn="ctr" indent="0" marL="0">
+              <a:buNone/>
+            </a:pPr>
+            <a:r>
+              <a:rPr lang="en-US" sz="1200" i="1" dirty="0">
+                <a:solidFill>
+                  <a:srgbClr val="6B7280"/>
+                </a:solidFill>
+                <a:latin typeface="Calibri" pitchFamily="34" charset="0"/>
+                <a:ea typeface="Calibri" pitchFamily="34" charset="-122"/>
+                <a:cs typeface="Calibri" pitchFamily="34" charset="-120"/>
+              </a:rPr>
+              <a:t>derde tak uitgelicht</a:t>
+            </a:r>
+            <a:endParaRPr lang="en-US" sz="1200" dirty="0"/>
+          </a:p>
+        </p:txBody>
+      </p:sp>
+      <p:sp>
+        <p:nvSpPr>
+          <p:cNvPr id="5" name="Shape 2"/>
+          <p:cNvSpPr/>
+          <p:nvPr/>
+        </p:nvSpPr>
+        <p:spPr>
+          <a:xfrm>
+            <a:off x="0" y="6172200"/>
+            <a:ext cx="12188952" cy="685800"/>
+          </a:xfrm>
+          <a:prstGeom prst="rect">
+            <a:avLst/>
           </a:prstGeom>
           <a:solidFill>
             <a:srgbClr val="EEF1F6"/>
           </a:solidFill>
-          <a:ln w="12700">
-            <a:solidFill>
-              <a:srgbClr val="D7DCE5"/>
-            </a:solidFill>
-            <a:prstDash val="solid"/>
-          </a:ln>
-        </p:spPr>
-      </p:sp>
-      <p:sp>
-        <p:nvSpPr>
-          <p:cNvPr id="4" name="Text 2"/>
-          <p:cNvSpPr/>
-          <p:nvPr/>
-        </p:nvSpPr>
-        <p:spPr>
-          <a:xfrm>
-            <a:off x="1188720" y="1645920"/>
-            <a:ext cx="2743200" cy="365760"/>
-          </a:xfrm>
-          <a:prstGeom prst="rect">
-            <a:avLst/>
-          </a:prstGeom>
-          <a:noFill/>
-          <a:ln/>
-        </p:spPr>
-        <p:txBody>
-          <a:bodyPr wrap="square" rtlCol="0" anchor="ctr"/>
-          <a:lstStyle/>
-          <a:p>
-            <a:pPr indent="0" marL="0">
-              <a:buNone/>
-            </a:pPr>
-            <a:r>
-              <a:rPr lang="en-US" sz="1200" b="1" spc="200" kern="0" dirty="0">
-                <a:solidFill>
-                  <a:srgbClr val="E9A13B"/>
-                </a:solidFill>
-                <a:latin typeface="Calibri" pitchFamily="34" charset="0"/>
-                <a:ea typeface="Calibri" pitchFamily="34" charset="-122"/>
-                <a:cs typeface="Calibri" pitchFamily="34" charset="-120"/>
-              </a:rPr>
-              <a:t>BEELD</a:t>
-            </a:r>
-            <a:endParaRPr lang="en-US" sz="1200" dirty="0"/>
-          </a:p>
-        </p:txBody>
-      </p:sp>
-      <p:sp>
-        <p:nvSpPr>
-          <p:cNvPr id="5" name="Text 3"/>
-          <p:cNvSpPr/>
-          <p:nvPr/>
-        </p:nvSpPr>
-        <p:spPr>
-          <a:xfrm>
-            <a:off x="1188720" y="2103120"/>
-            <a:ext cx="9784080" cy="3200400"/>
-          </a:xfrm>
-          <a:prstGeom prst="rect">
-            <a:avLst/>
-          </a:prstGeom>
-          <a:noFill/>
-          <a:ln/>
-        </p:spPr>
-        <p:txBody>
-          <a:bodyPr wrap="square" rtlCol="0" anchor="t"/>
-          <a:lstStyle/>
-          <a:p>
-            <a:pPr indent="0" marL="0">
-              <a:buNone/>
-            </a:pPr>
-            <a:r>
-              <a:rPr lang="en-US" sz="1800" i="1" dirty="0">
-                <a:solidFill>
-                  <a:srgbClr val="14213D"/>
-                </a:solidFill>
-                <a:latin typeface="Calibri" pitchFamily="34" charset="0"/>
-                <a:ea typeface="Calibri" pitchFamily="34" charset="-122"/>
-                <a:cs typeface="Calibri" pitchFamily="34" charset="-120"/>
-              </a:rPr>
-              <a:t>Werkboekverwijzing, timer 15 minuten</a:t>
-            </a:r>
-            <a:endParaRPr lang="en-US" sz="1800" dirty="0"/>
-          </a:p>
-        </p:txBody>
-      </p:sp>
-      <p:sp>
-        <p:nvSpPr>
-          <p:cNvPr id="6" name="Shape 4"/>
-          <p:cNvSpPr/>
-          <p:nvPr/>
-        </p:nvSpPr>
-        <p:spPr>
-          <a:xfrm>
-            <a:off x="0" y="6172200"/>
-            <a:ext cx="12188952" cy="685800"/>
-          </a:xfrm>
-          <a:prstGeom prst="rect">
-            <a:avLst/>
-          </a:prstGeom>
-          <a:solidFill>
-            <a:srgbClr val="EEF1F6"/>
-          </a:solidFill>
-          <a:ln/>
-        </p:spPr>
-      </p:sp>
-      <p:sp>
-        <p:nvSpPr>
-          <p:cNvPr id="7" name="Text 5"/>
+          <a:ln/>
+        </p:spPr>
+      </p:sp>
+      <p:sp>
+        <p:nvSpPr>
+          <p:cNvPr id="6" name="Text 3"/>
           <p:cNvSpPr/>
           <p:nvPr/>
         </p:nvSpPr>
@@ -4324,7 +4371,7 @@
                 <a:ea typeface="Calibri" pitchFamily="34" charset="-122"/>
                 <a:cs typeface="Calibri" pitchFamily="34" charset="-120"/>
               </a:rPr>
-              <a:t>Spreeknotitie: Tweetallen. Let op de reflex om automatisch naar "verouderd model" te grijpen.</a:t>
+              <a:t>Spreeknotitie: Niet fout, niet verouderd — gewoon nooit opgeschreven.</a:t>
             </a:r>
             <a:endParaRPr lang="en-US" sz="1050" dirty="0"/>
           </a:p>
@@ -4395,98 +4442,140 @@
                 <a:ea typeface="Calibri" pitchFamily="34" charset="-122"/>
                 <a:cs typeface="Calibri" pitchFamily="34" charset="-120"/>
               </a:rPr>
-              <a:t>Drie uitkomsten: wijzig het model, stuur bij, of doe bewust niets</a:t>
+              <a:t>Classificeer vijf afwijkingen</a:t>
             </a:r>
             <a:endParaRPr lang="en-US" sz="2400" dirty="0"/>
           </a:p>
         </p:txBody>
       </p:sp>
-      <p:pic>
-        <p:nvPicPr>
-          <p:cNvPr id="3" name="Image 0" descr="C:\Projecten\eductus-trainingen\CMMN_BPMN_DMN\cursus-bpmn-cmmn-dmn\build\png\deel-20\figuur-20-6-bevindingenrapport-opbouw.png">    </p:cNvPr>
-          <p:cNvPicPr>
-            <a:picLocks noChangeAspect="1"/>
-          </p:cNvPicPr>
-          <p:nvPr/>
-        </p:nvPicPr>
-        <p:blipFill>
-          <a:blip r:embed="rId1"/>
-          <a:stretch>
-            <a:fillRect/>
-          </a:stretch>
-        </p:blipFill>
-        <p:spPr>
-          <a:xfrm>
-            <a:off x="2180279" y="1234440"/>
-            <a:ext cx="7828395" cy="4114800"/>
-          </a:xfrm>
-          <a:prstGeom prst="rect">
-            <a:avLst/>
-          </a:prstGeom>
-        </p:spPr>
-      </p:pic>
-      <p:sp>
-        <p:nvSpPr>
-          <p:cNvPr id="4" name="Text 1"/>
-          <p:cNvSpPr/>
-          <p:nvPr/>
-        </p:nvSpPr>
-        <p:spPr>
-          <a:xfrm>
-            <a:off x="731520" y="5440680"/>
-            <a:ext cx="10698480" cy="457200"/>
-          </a:xfrm>
-          <a:prstGeom prst="rect">
-            <a:avLst/>
-          </a:prstGeom>
-          <a:noFill/>
-          <a:ln/>
-        </p:spPr>
-        <p:txBody>
-          <a:bodyPr wrap="square" rtlCol="0" anchor="ctr"/>
-          <a:lstStyle/>
-          <a:p>
-            <a:pPr algn="ctr" indent="0" marL="0">
-              <a:buNone/>
-            </a:pPr>
-            <a:r>
-              <a:rPr lang="en-US" sz="1200" i="1" dirty="0">
-                <a:solidFill>
-                  <a:srgbClr val="6B7280"/>
-                </a:solidFill>
-                <a:latin typeface="Calibri" pitchFamily="34" charset="0"/>
-                <a:ea typeface="Calibri" pitchFamily="34" charset="-122"/>
-                <a:cs typeface="Calibri" pitchFamily="34" charset="-120"/>
-              </a:rPr>
-              <a:t>Figuur 20.6</a:t>
-            </a:r>
-            <a:endParaRPr lang="en-US" sz="1200" dirty="0"/>
-          </a:p>
-        </p:txBody>
-      </p:sp>
-      <p:sp>
-        <p:nvSpPr>
-          <p:cNvPr id="5" name="Shape 2"/>
-          <p:cNvSpPr/>
-          <p:nvPr/>
-        </p:nvSpPr>
-        <p:spPr>
-          <a:xfrm>
-            <a:off x="0" y="6172200"/>
-            <a:ext cx="12188952" cy="685800"/>
-          </a:xfrm>
-          <a:prstGeom prst="rect">
-            <a:avLst/>
+      <p:sp>
+        <p:nvSpPr>
+          <p:cNvPr id="3" name="Shape 1"/>
+          <p:cNvSpPr/>
+          <p:nvPr/>
+        </p:nvSpPr>
+        <p:spPr>
+          <a:xfrm>
+            <a:off x="822960" y="1371600"/>
+            <a:ext cx="10515600" cy="4206240"/>
+          </a:xfrm>
+          <a:prstGeom prst="roundRect">
+            <a:avLst>
+              <a:gd name="adj" fmla="val 1304"/>
+            </a:avLst>
           </a:prstGeom>
           <a:solidFill>
             <a:srgbClr val="EEF1F6"/>
           </a:solidFill>
-          <a:ln/>
-        </p:spPr>
-      </p:sp>
-      <p:sp>
-        <p:nvSpPr>
-          <p:cNvPr id="6" name="Text 3"/>
+          <a:ln w="12700">
+            <a:solidFill>
+              <a:srgbClr val="D7DCE5"/>
+            </a:solidFill>
+            <a:prstDash val="solid"/>
+          </a:ln>
+        </p:spPr>
+      </p:sp>
+      <p:sp>
+        <p:nvSpPr>
+          <p:cNvPr id="4" name="Text 2"/>
+          <p:cNvSpPr/>
+          <p:nvPr/>
+        </p:nvSpPr>
+        <p:spPr>
+          <a:xfrm>
+            <a:off x="1188720" y="1645920"/>
+            <a:ext cx="2743200" cy="365760"/>
+          </a:xfrm>
+          <a:prstGeom prst="rect">
+            <a:avLst/>
+          </a:prstGeom>
+          <a:noFill/>
+          <a:ln/>
+        </p:spPr>
+        <p:txBody>
+          <a:bodyPr wrap="square" rtlCol="0" anchor="ctr"/>
+          <a:lstStyle/>
+          <a:p>
+            <a:pPr indent="0" marL="0">
+              <a:buNone/>
+            </a:pPr>
+            <a:r>
+              <a:rPr lang="en-US" sz="1200" b="1" spc="200" kern="0" dirty="0">
+                <a:solidFill>
+                  <a:srgbClr val="E9A13B"/>
+                </a:solidFill>
+                <a:latin typeface="Calibri" pitchFamily="34" charset="0"/>
+                <a:ea typeface="Calibri" pitchFamily="34" charset="-122"/>
+                <a:cs typeface="Calibri" pitchFamily="34" charset="-120"/>
+              </a:rPr>
+              <a:t>BEELD</a:t>
+            </a:r>
+            <a:endParaRPr lang="en-US" sz="1200" dirty="0"/>
+          </a:p>
+        </p:txBody>
+      </p:sp>
+      <p:sp>
+        <p:nvSpPr>
+          <p:cNvPr id="5" name="Text 3"/>
+          <p:cNvSpPr/>
+          <p:nvPr/>
+        </p:nvSpPr>
+        <p:spPr>
+          <a:xfrm>
+            <a:off x="1188720" y="2103120"/>
+            <a:ext cx="9784080" cy="3200400"/>
+          </a:xfrm>
+          <a:prstGeom prst="rect">
+            <a:avLst/>
+          </a:prstGeom>
+          <a:noFill/>
+          <a:ln/>
+        </p:spPr>
+        <p:txBody>
+          <a:bodyPr wrap="square" rtlCol="0" anchor="t"/>
+          <a:lstStyle/>
+          <a:p>
+            <a:pPr indent="0" marL="0">
+              <a:buNone/>
+            </a:pPr>
+            <a:r>
+              <a:rPr lang="en-US" sz="1800" i="1" dirty="0">
+                <a:solidFill>
+                  <a:srgbClr val="14213D"/>
+                </a:solidFill>
+                <a:latin typeface="Calibri" pitchFamily="34" charset="0"/>
+                <a:ea typeface="Calibri" pitchFamily="34" charset="-122"/>
+                <a:cs typeface="Calibri" pitchFamily="34" charset="-120"/>
+              </a:rPr>
+              <a:t>Werkboekverwijzing, timer 15 minuten</a:t>
+            </a:r>
+            <a:endParaRPr lang="en-US" sz="1800" dirty="0"/>
+          </a:p>
+        </p:txBody>
+      </p:sp>
+      <p:sp>
+        <p:nvSpPr>
+          <p:cNvPr id="6" name="Shape 4"/>
+          <p:cNvSpPr/>
+          <p:nvPr/>
+        </p:nvSpPr>
+        <p:spPr>
+          <a:xfrm>
+            <a:off x="0" y="6172200"/>
+            <a:ext cx="12188952" cy="685800"/>
+          </a:xfrm>
+          <a:prstGeom prst="rect">
+            <a:avLst/>
+          </a:prstGeom>
+          <a:solidFill>
+            <a:srgbClr val="EEF1F6"/>
+          </a:solidFill>
+          <a:ln/>
+        </p:spPr>
+      </p:sp>
+      <p:sp>
+        <p:nvSpPr>
+          <p:cNvPr id="7" name="Text 5"/>
           <p:cNvSpPr/>
           <p:nvPr/>
         </p:nvSpPr>
@@ -4517,7 +4606,7 @@
                 <a:ea typeface="Calibri" pitchFamily="34" charset="-122"/>
                 <a:cs typeface="Calibri" pitchFamily="34" charset="-120"/>
               </a:rPr>
-              <a:t>Spreeknotitie: Een rapport zonder voorstel is geen resultaat.</a:t>
+              <a:t>Spreeknotitie: Tweetallen. Let op de reflex om automatisch naar "verouderd model" te grijpen.</a:t>
             </a:r>
             <a:endParaRPr lang="en-US" sz="1050" dirty="0"/>
           </a:p>
@@ -4588,140 +4677,98 @@
                 <a:ea typeface="Calibri" pitchFamily="34" charset="-122"/>
                 <a:cs typeface="Calibri" pitchFamily="34" charset="-120"/>
               </a:rPr>
-              <a:t>Wát er gebeurde, niet waarom</a:t>
+              <a:t>Drie uitkomsten: wijzig het model, stuur bij, of doe bewust niets</a:t>
             </a:r>
             <a:endParaRPr lang="en-US" sz="2400" dirty="0"/>
           </a:p>
         </p:txBody>
       </p:sp>
-      <p:sp>
-        <p:nvSpPr>
-          <p:cNvPr id="3" name="Shape 1"/>
-          <p:cNvSpPr/>
-          <p:nvPr/>
-        </p:nvSpPr>
-        <p:spPr>
-          <a:xfrm>
-            <a:off x="822960" y="1371600"/>
-            <a:ext cx="10515600" cy="4206240"/>
-          </a:xfrm>
-          <a:prstGeom prst="roundRect">
-            <a:avLst>
-              <a:gd name="adj" fmla="val 1304"/>
-            </a:avLst>
+      <p:pic>
+        <p:nvPicPr>
+          <p:cNvPr id="3" name="Image 0" descr="C:\Projecten\eductus-trainingen\CMMN_BPMN_DMN\cursus-bpmn-cmmn-dmn\build\png\deel-20\figuur-20-6-bevindingenrapport-opbouw.png">    </p:cNvPr>
+          <p:cNvPicPr>
+            <a:picLocks noChangeAspect="1"/>
+          </p:cNvPicPr>
+          <p:nvPr/>
+        </p:nvPicPr>
+        <p:blipFill>
+          <a:blip r:embed="rId1"/>
+          <a:stretch>
+            <a:fillRect/>
+          </a:stretch>
+        </p:blipFill>
+        <p:spPr>
+          <a:xfrm>
+            <a:off x="2180279" y="1234440"/>
+            <a:ext cx="7828395" cy="4114800"/>
+          </a:xfrm>
+          <a:prstGeom prst="rect">
+            <a:avLst/>
+          </a:prstGeom>
+        </p:spPr>
+      </p:pic>
+      <p:sp>
+        <p:nvSpPr>
+          <p:cNvPr id="4" name="Text 1"/>
+          <p:cNvSpPr/>
+          <p:nvPr/>
+        </p:nvSpPr>
+        <p:spPr>
+          <a:xfrm>
+            <a:off x="731520" y="5440680"/>
+            <a:ext cx="10698480" cy="457200"/>
+          </a:xfrm>
+          <a:prstGeom prst="rect">
+            <a:avLst/>
+          </a:prstGeom>
+          <a:noFill/>
+          <a:ln/>
+        </p:spPr>
+        <p:txBody>
+          <a:bodyPr wrap="square" rtlCol="0" anchor="ctr"/>
+          <a:lstStyle/>
+          <a:p>
+            <a:pPr algn="ctr" indent="0" marL="0">
+              <a:buNone/>
+            </a:pPr>
+            <a:r>
+              <a:rPr lang="en-US" sz="1200" i="1" dirty="0">
+                <a:solidFill>
+                  <a:srgbClr val="6B7280"/>
+                </a:solidFill>
+                <a:latin typeface="Calibri" pitchFamily="34" charset="0"/>
+                <a:ea typeface="Calibri" pitchFamily="34" charset="-122"/>
+                <a:cs typeface="Calibri" pitchFamily="34" charset="-120"/>
+              </a:rPr>
+              <a:t>Figuur 20.6</a:t>
+            </a:r>
+            <a:endParaRPr lang="en-US" sz="1200" dirty="0"/>
+          </a:p>
+        </p:txBody>
+      </p:sp>
+      <p:sp>
+        <p:nvSpPr>
+          <p:cNvPr id="5" name="Shape 2"/>
+          <p:cNvSpPr/>
+          <p:nvPr/>
+        </p:nvSpPr>
+        <p:spPr>
+          <a:xfrm>
+            <a:off x="0" y="6172200"/>
+            <a:ext cx="12188952" cy="685800"/>
+          </a:xfrm>
+          <a:prstGeom prst="rect">
+            <a:avLst/>
           </a:prstGeom>
           <a:solidFill>
             <a:srgbClr val="EEF1F6"/>
           </a:solidFill>
-          <a:ln w="12700">
-            <a:solidFill>
-              <a:srgbClr val="D7DCE5"/>
-            </a:solidFill>
-            <a:prstDash val="solid"/>
-          </a:ln>
-        </p:spPr>
-      </p:sp>
-      <p:sp>
-        <p:nvSpPr>
-          <p:cNvPr id="4" name="Text 2"/>
-          <p:cNvSpPr/>
-          <p:nvPr/>
-        </p:nvSpPr>
-        <p:spPr>
-          <a:xfrm>
-            <a:off x="1188720" y="1645920"/>
-            <a:ext cx="2743200" cy="365760"/>
-          </a:xfrm>
-          <a:prstGeom prst="rect">
-            <a:avLst/>
-          </a:prstGeom>
-          <a:noFill/>
-          <a:ln/>
-        </p:spPr>
-        <p:txBody>
-          <a:bodyPr wrap="square" rtlCol="0" anchor="ctr"/>
-          <a:lstStyle/>
-          <a:p>
-            <a:pPr indent="0" marL="0">
-              <a:buNone/>
-            </a:pPr>
-            <a:r>
-              <a:rPr lang="en-US" sz="1200" b="1" spc="200" kern="0" dirty="0">
-                <a:solidFill>
-                  <a:srgbClr val="E9A13B"/>
-                </a:solidFill>
-                <a:latin typeface="Calibri" pitchFamily="34" charset="0"/>
-                <a:ea typeface="Calibri" pitchFamily="34" charset="-122"/>
-                <a:cs typeface="Calibri" pitchFamily="34" charset="-120"/>
-              </a:rPr>
-              <a:t>BEELD</a:t>
-            </a:r>
-            <a:endParaRPr lang="en-US" sz="1200" dirty="0"/>
-          </a:p>
-        </p:txBody>
-      </p:sp>
-      <p:sp>
-        <p:nvSpPr>
-          <p:cNvPr id="5" name="Text 3"/>
-          <p:cNvSpPr/>
-          <p:nvPr/>
-        </p:nvSpPr>
-        <p:spPr>
-          <a:xfrm>
-            <a:off x="1188720" y="2103120"/>
-            <a:ext cx="9784080" cy="3200400"/>
-          </a:xfrm>
-          <a:prstGeom prst="rect">
-            <a:avLst/>
-          </a:prstGeom>
-          <a:noFill/>
-          <a:ln/>
-        </p:spPr>
-        <p:txBody>
-          <a:bodyPr wrap="square" rtlCol="0" anchor="t"/>
-          <a:lstStyle/>
-          <a:p>
-            <a:pPr indent="0" marL="0">
-              <a:buNone/>
-            </a:pPr>
-            <a:r>
-              <a:rPr lang="en-US" sz="1800" i="1" dirty="0">
-                <a:solidFill>
-                  <a:srgbClr val="14213D"/>
-                </a:solidFill>
-                <a:latin typeface="Calibri" pitchFamily="34" charset="0"/>
-                <a:ea typeface="Calibri" pitchFamily="34" charset="-122"/>
-                <a:cs typeface="Calibri" pitchFamily="34" charset="-120"/>
-              </a:rPr>
-              <a:t>Eén tekstslide</a:t>
-            </a:r>
-            <a:endParaRPr lang="en-US" sz="1800" dirty="0"/>
-          </a:p>
-        </p:txBody>
-      </p:sp>
-      <p:sp>
-        <p:nvSpPr>
-          <p:cNvPr id="6" name="Shape 4"/>
-          <p:cNvSpPr/>
-          <p:nvPr/>
-        </p:nvSpPr>
-        <p:spPr>
-          <a:xfrm>
-            <a:off x="0" y="6172200"/>
-            <a:ext cx="12188952" cy="685800"/>
-          </a:xfrm>
-          <a:prstGeom prst="rect">
-            <a:avLst/>
-          </a:prstGeom>
-          <a:solidFill>
-            <a:srgbClr val="EEF1F6"/>
-          </a:solidFill>
-          <a:ln/>
-        </p:spPr>
-      </p:sp>
-      <p:sp>
-        <p:nvSpPr>
-          <p:cNvPr id="7" name="Text 5"/>
+          <a:ln/>
+        </p:spPr>
+      </p:sp>
+      <p:sp>
+        <p:nvSpPr>
+          <p:cNvPr id="6" name="Text 3"/>
           <p:cNvSpPr/>
           <p:nvPr/>
         </p:nvSpPr>
@@ -4752,7 +4799,7 @@
                 <a:ea typeface="Calibri" pitchFamily="34" charset="-122"/>
                 <a:cs typeface="Calibri" pitchFamily="34" charset="-120"/>
               </a:rPr>
-              <a:t>Spreeknotitie: Voor het waarom heb je deel 12's technieken nog steeds nodig.</a:t>
+              <a:t>Spreeknotitie: Een rapport zonder voorstel is geen resultaat.</a:t>
             </a:r>
             <a:endParaRPr lang="en-US" sz="1050" dirty="0"/>
           </a:p>
@@ -4823,7 +4870,7 @@
                 <a:ea typeface="Calibri" pitchFamily="34" charset="-122"/>
                 <a:cs typeface="Calibri" pitchFamily="34" charset="-120"/>
               </a:rPr>
-              <a:t>Het bevindingenrapport, en de grenzen van mining</a:t>
+              <a:t>Wát er gebeurde, niet waarom</a:t>
             </a:r>
             <a:endParaRPr lang="en-US" sz="2400" dirty="0"/>
           </a:p>
@@ -4928,7 +4975,7 @@
                 <a:ea typeface="Calibri" pitchFamily="34" charset="-122"/>
                 <a:cs typeface="Calibri" pitchFamily="34" charset="-120"/>
               </a:rPr>
-              <a:t>Werkboekverwijzing, inleverdatum</a:t>
+              <a:t>Eén tekstslide</a:t>
             </a:r>
             <a:endParaRPr lang="en-US" sz="1800" dirty="0"/>
           </a:p>
@@ -4987,7 +5034,7 @@
                 <a:ea typeface="Calibri" pitchFamily="34" charset="-122"/>
                 <a:cs typeface="Calibri" pitchFamily="34" charset="-120"/>
               </a:rPr>
-              <a:t>Spreeknotitie: Opdracht 5 als huiswerk; opdracht 6 kort zelfstandig.</a:t>
+              <a:t>Spreeknotitie: Voor het waarom heb je deel 12's technieken nog steeds nodig.</a:t>
             </a:r>
             <a:endParaRPr lang="en-US" sz="1050" dirty="0"/>
           </a:p>
@@ -5058,7 +5105,7 @@
                 <a:ea typeface="Calibri" pitchFamily="34" charset="-122"/>
                 <a:cs typeface="Calibri" pitchFamily="34" charset="-120"/>
               </a:rPr>
-              <a:t>Onderdeel van een driedelige BPMN/CMMN/DMN-cursus</a:t>
+              <a:t>Na vandaag kun je…</a:t>
             </a:r>
             <a:endParaRPr lang="en-US" sz="2400" dirty="0"/>
           </a:p>
@@ -5163,7 +5210,7 @@
                 <a:ea typeface="Calibri" pitchFamily="34" charset="-122"/>
                 <a:cs typeface="Calibri" pitchFamily="34" charset="-120"/>
               </a:rPr>
-              <a:t>Kort overzicht van de drie niveaus, dit deel gemarkeerd</a:t>
+              <a:t>Vijf leerdoelen uit de reader</a:t>
             </a:r>
             <a:endParaRPr lang="en-US" sz="1800" dirty="0"/>
           </a:p>
@@ -5222,7 +5269,7 @@
                 <a:ea typeface="Calibri" pitchFamily="34" charset="-122"/>
                 <a:cs typeface="Calibri" pitchFamily="34" charset="-120"/>
               </a:rPr>
-              <a:t>Spreeknotitie: Alleen tonen bij een volledige-programma-afname.</a:t>
+              <a:t>Spreeknotitie: Kort.</a:t>
             </a:r>
             <a:endParaRPr lang="en-US" sz="1050" dirty="0"/>
           </a:p>
@@ -5293,7 +5340,7 @@
                 <a:ea typeface="Calibri" pitchFamily="34" charset="-122"/>
                 <a:cs typeface="Calibri" pitchFamily="34" charset="-120"/>
               </a:rPr>
-              <a:t>Stellingen</a:t>
+              <a:t>Het bevindingenrapport, en de grenzen van mining</a:t>
             </a:r>
             <a:endParaRPr lang="en-US" sz="2400" dirty="0"/>
           </a:p>
@@ -5398,7 +5445,7 @@
                 <a:ea typeface="Calibri" pitchFamily="34" charset="-122"/>
                 <a:cs typeface="Calibri" pitchFamily="34" charset="-120"/>
               </a:rPr>
-              <a:t>Vier stellingen uit het werkboek</a:t>
+              <a:t>Werkboekverwijzing, inleverdatum</a:t>
             </a:r>
             <a:endParaRPr lang="en-US" sz="1800" dirty="0"/>
           </a:p>
@@ -5457,7 +5504,7 @@
                 <a:ea typeface="Calibri" pitchFamily="34" charset="-122"/>
                 <a:cs typeface="Calibri" pitchFamily="34" charset="-120"/>
               </a:rPr>
-              <a:t>Spreeknotitie: Plenair.</a:t>
+              <a:t>Spreeknotitie: Opdracht 5 als huiswerk; opdracht 6 kort zelfstandig.</a:t>
             </a:r>
             <a:endParaRPr lang="en-US" sz="1050" dirty="0"/>
           </a:p>
@@ -5474,6 +5521,241 @@
 <file path=ppt/slides/slide21.xml><?xml version="1.0" encoding="utf-8"?>
 <p:sld xmlns:a="http://schemas.openxmlformats.org/drawingml/2006/main" xmlns:r="http://schemas.openxmlformats.org/officeDocument/2006/relationships" xmlns:p="http://schemas.openxmlformats.org/presentationml/2006/main">
   <p:cSld name="Slide 21">
+    <p:bg>
+      <p:bgPr>
+        <a:solidFill>
+          <a:srgbClr val="FFFFFF"/>
+        </a:solidFill>
+      </p:bgPr>
+    </p:bg>
+    <p:spTree>
+      <p:nvGrpSpPr>
+        <p:cNvPr id="1" name=""/>
+        <p:cNvGrpSpPr/>
+        <p:nvPr/>
+      </p:nvGrpSpPr>
+      <p:grpSpPr>
+        <a:xfrm>
+          <a:off x="0" y="0"/>
+          <a:ext cx="0" cy="0"/>
+          <a:chOff x="0" y="0"/>
+          <a:chExt cx="0" cy="0"/>
+        </a:xfrm>
+      </p:grpSpPr>
+      <p:sp>
+        <p:nvSpPr>
+          <p:cNvPr id="2" name="Text 0"/>
+          <p:cNvSpPr/>
+          <p:nvPr/>
+        </p:nvSpPr>
+        <p:spPr>
+          <a:xfrm>
+            <a:off x="640080" y="365760"/>
+            <a:ext cx="10881360" cy="731520"/>
+          </a:xfrm>
+          <a:prstGeom prst="rect">
+            <a:avLst/>
+          </a:prstGeom>
+          <a:noFill/>
+          <a:ln/>
+        </p:spPr>
+        <p:txBody>
+          <a:bodyPr wrap="square" rtlCol="0" anchor="ctr"/>
+          <a:lstStyle/>
+          <a:p>
+            <a:pPr indent="0" marL="0">
+              <a:buNone/>
+            </a:pPr>
+            <a:r>
+              <a:rPr lang="en-US" sz="2400" b="1" dirty="0">
+                <a:solidFill>
+                  <a:srgbClr val="14213D"/>
+                </a:solidFill>
+                <a:latin typeface="Calibri" pitchFamily="34" charset="0"/>
+                <a:ea typeface="Calibri" pitchFamily="34" charset="-122"/>
+                <a:cs typeface="Calibri" pitchFamily="34" charset="-120"/>
+              </a:rPr>
+              <a:t>Stellingen</a:t>
+            </a:r>
+            <a:endParaRPr lang="en-US" sz="2400" dirty="0"/>
+          </a:p>
+        </p:txBody>
+      </p:sp>
+      <p:sp>
+        <p:nvSpPr>
+          <p:cNvPr id="3" name="Shape 1"/>
+          <p:cNvSpPr/>
+          <p:nvPr/>
+        </p:nvSpPr>
+        <p:spPr>
+          <a:xfrm>
+            <a:off x="822960" y="1371600"/>
+            <a:ext cx="10515600" cy="4206240"/>
+          </a:xfrm>
+          <a:prstGeom prst="roundRect">
+            <a:avLst>
+              <a:gd name="adj" fmla="val 1304"/>
+            </a:avLst>
+          </a:prstGeom>
+          <a:solidFill>
+            <a:srgbClr val="EEF1F6"/>
+          </a:solidFill>
+          <a:ln w="12700">
+            <a:solidFill>
+              <a:srgbClr val="D7DCE5"/>
+            </a:solidFill>
+            <a:prstDash val="solid"/>
+          </a:ln>
+        </p:spPr>
+      </p:sp>
+      <p:sp>
+        <p:nvSpPr>
+          <p:cNvPr id="4" name="Text 2"/>
+          <p:cNvSpPr/>
+          <p:nvPr/>
+        </p:nvSpPr>
+        <p:spPr>
+          <a:xfrm>
+            <a:off x="1188720" y="1645920"/>
+            <a:ext cx="2743200" cy="365760"/>
+          </a:xfrm>
+          <a:prstGeom prst="rect">
+            <a:avLst/>
+          </a:prstGeom>
+          <a:noFill/>
+          <a:ln/>
+        </p:spPr>
+        <p:txBody>
+          <a:bodyPr wrap="square" rtlCol="0" anchor="ctr"/>
+          <a:lstStyle/>
+          <a:p>
+            <a:pPr indent="0" marL="0">
+              <a:buNone/>
+            </a:pPr>
+            <a:r>
+              <a:rPr lang="en-US" sz="1200" b="1" spc="200" kern="0" dirty="0">
+                <a:solidFill>
+                  <a:srgbClr val="E9A13B"/>
+                </a:solidFill>
+                <a:latin typeface="Calibri" pitchFamily="34" charset="0"/>
+                <a:ea typeface="Calibri" pitchFamily="34" charset="-122"/>
+                <a:cs typeface="Calibri" pitchFamily="34" charset="-120"/>
+              </a:rPr>
+              <a:t>BEELD</a:t>
+            </a:r>
+            <a:endParaRPr lang="en-US" sz="1200" dirty="0"/>
+          </a:p>
+        </p:txBody>
+      </p:sp>
+      <p:sp>
+        <p:nvSpPr>
+          <p:cNvPr id="5" name="Text 3"/>
+          <p:cNvSpPr/>
+          <p:nvPr/>
+        </p:nvSpPr>
+        <p:spPr>
+          <a:xfrm>
+            <a:off x="1188720" y="2103120"/>
+            <a:ext cx="9784080" cy="3200400"/>
+          </a:xfrm>
+          <a:prstGeom prst="rect">
+            <a:avLst/>
+          </a:prstGeom>
+          <a:noFill/>
+          <a:ln/>
+        </p:spPr>
+        <p:txBody>
+          <a:bodyPr wrap="square" rtlCol="0" anchor="t"/>
+          <a:lstStyle/>
+          <a:p>
+            <a:pPr indent="0" marL="0">
+              <a:buNone/>
+            </a:pPr>
+            <a:r>
+              <a:rPr lang="en-US" sz="1800" i="1" dirty="0">
+                <a:solidFill>
+                  <a:srgbClr val="14213D"/>
+                </a:solidFill>
+                <a:latin typeface="Calibri" pitchFamily="34" charset="0"/>
+                <a:ea typeface="Calibri" pitchFamily="34" charset="-122"/>
+                <a:cs typeface="Calibri" pitchFamily="34" charset="-120"/>
+              </a:rPr>
+              <a:t>Vier stellingen uit het werkboek</a:t>
+            </a:r>
+            <a:endParaRPr lang="en-US" sz="1800" dirty="0"/>
+          </a:p>
+        </p:txBody>
+      </p:sp>
+      <p:sp>
+        <p:nvSpPr>
+          <p:cNvPr id="6" name="Shape 4"/>
+          <p:cNvSpPr/>
+          <p:nvPr/>
+        </p:nvSpPr>
+        <p:spPr>
+          <a:xfrm>
+            <a:off x="0" y="6172200"/>
+            <a:ext cx="12188952" cy="685800"/>
+          </a:xfrm>
+          <a:prstGeom prst="rect">
+            <a:avLst/>
+          </a:prstGeom>
+          <a:solidFill>
+            <a:srgbClr val="EEF1F6"/>
+          </a:solidFill>
+          <a:ln/>
+        </p:spPr>
+      </p:sp>
+      <p:sp>
+        <p:nvSpPr>
+          <p:cNvPr id="7" name="Text 5"/>
+          <p:cNvSpPr/>
+          <p:nvPr/>
+        </p:nvSpPr>
+        <p:spPr>
+          <a:xfrm>
+            <a:off x="457200" y="6217920"/>
+            <a:ext cx="11247120" cy="594360"/>
+          </a:xfrm>
+          <a:prstGeom prst="rect">
+            <a:avLst/>
+          </a:prstGeom>
+          <a:noFill/>
+          <a:ln/>
+        </p:spPr>
+        <p:txBody>
+          <a:bodyPr wrap="square" rtlCol="0" anchor="ctr"/>
+          <a:lstStyle/>
+          <a:p>
+            <a:pPr indent="0" marL="0">
+              <a:buNone/>
+            </a:pPr>
+            <a:r>
+              <a:rPr lang="en-US" sz="1050" i="1" dirty="0">
+                <a:solidFill>
+                  <a:srgbClr val="6B7280"/>
+                </a:solidFill>
+                <a:latin typeface="Calibri" pitchFamily="34" charset="0"/>
+                <a:ea typeface="Calibri" pitchFamily="34" charset="-122"/>
+                <a:cs typeface="Calibri" pitchFamily="34" charset="-120"/>
+              </a:rPr>
+              <a:t>Spreeknotitie: Plenair.</a:t>
+            </a:r>
+            <a:endParaRPr lang="en-US" sz="1050" dirty="0"/>
+          </a:p>
+        </p:txBody>
+      </p:sp>
+    </p:spTree>
+  </p:cSld>
+  <p:clrMapOvr>
+    <a:masterClrMapping/>
+  </p:clrMapOvr>
+</p:sld>
+</file>
+
+<file path=ppt/slides/slide22.xml><?xml version="1.0" encoding="utf-8"?>
+<p:sld xmlns:a="http://schemas.openxmlformats.org/drawingml/2006/main" xmlns:r="http://schemas.openxmlformats.org/officeDocument/2006/relationships" xmlns:p="http://schemas.openxmlformats.org/presentationml/2006/main">
+  <p:cSld name="Slide 22">
     <p:bg>
       <p:bgPr>
         <a:solidFill>
@@ -5658,7 +5940,7 @@
                 <a:ea typeface="Calibri" pitchFamily="34" charset="-122"/>
                 <a:cs typeface="Calibri" pitchFamily="34" charset="-120"/>
               </a:rPr>
-              <a:t>Retroductus — inloggen, een log uploaden</a:t>
+              <a:t>Onderdeel van een driedelige BPMN/CMMN/DMN-cursus</a:t>
             </a:r>
             <a:endParaRPr lang="en-US" sz="2400" dirty="0"/>
           </a:p>
@@ -5763,7 +6045,7 @@
                 <a:ea typeface="Calibri" pitchFamily="34" charset="-122"/>
                 <a:cs typeface="Calibri" pitchFamily="34" charset="-120"/>
               </a:rPr>
-              <a:t>Schermafbeelding van het startscherm</a:t>
+              <a:t>Kort overzicht van de drie niveaus, dit deel gemarkeerd</a:t>
             </a:r>
             <a:endParaRPr lang="en-US" sz="1800" dirty="0"/>
           </a:p>
@@ -5822,7 +6104,7 @@
                 <a:ea typeface="Calibri" pitchFamily="34" charset="-122"/>
                 <a:cs typeface="Calibri" pitchFamily="34" charset="-120"/>
               </a:rPr>
-              <a:t>Spreeknotitie: 10 minuten begeleid, net als bij de eerste modelleeromgeving in dit programma.</a:t>
+              <a:t>Spreeknotitie: Alleen tonen bij een volledige-programma-afname.</a:t>
             </a:r>
             <a:endParaRPr lang="en-US" sz="1050" dirty="0"/>
           </a:p>
@@ -5893,98 +6175,140 @@
                 <a:ea typeface="Calibri" pitchFamily="34" charset="-122"/>
                 <a:cs typeface="Calibri" pitchFamily="34" charset="-120"/>
               </a:rPr>
-              <a:t>Discovery · conformance checking · enhancement</a:t>
+              <a:t>Retroductus — inloggen, een log uploaden</a:t>
             </a:r>
             <a:endParaRPr lang="en-US" sz="2400" dirty="0"/>
           </a:p>
         </p:txBody>
       </p:sp>
-      <p:pic>
-        <p:nvPicPr>
-          <p:cNvPr id="3" name="Image 0" descr="C:\Projecten\eductus-trainingen\CMMN_BPMN_DMN\cursus-bpmn-cmmn-dmn\build\png\deel-20\figuur-20-1-drie-soorten-mining.png">    </p:cNvPr>
-          <p:cNvPicPr>
-            <a:picLocks noChangeAspect="1"/>
-          </p:cNvPicPr>
-          <p:nvPr/>
-        </p:nvPicPr>
-        <p:blipFill>
-          <a:blip r:embed="rId1"/>
-          <a:stretch>
-            <a:fillRect/>
-          </a:stretch>
-        </p:blipFill>
-        <p:spPr>
-          <a:xfrm>
-            <a:off x="2162556" y="1234440"/>
-            <a:ext cx="7863840" cy="4079367"/>
-          </a:xfrm>
-          <a:prstGeom prst="rect">
-            <a:avLst/>
-          </a:prstGeom>
-        </p:spPr>
-      </p:pic>
-      <p:sp>
-        <p:nvSpPr>
-          <p:cNvPr id="4" name="Text 1"/>
-          <p:cNvSpPr/>
-          <p:nvPr/>
-        </p:nvSpPr>
-        <p:spPr>
-          <a:xfrm>
-            <a:off x="731520" y="5405247"/>
-            <a:ext cx="10698480" cy="457200"/>
-          </a:xfrm>
-          <a:prstGeom prst="rect">
-            <a:avLst/>
-          </a:prstGeom>
-          <a:noFill/>
-          <a:ln/>
-        </p:spPr>
-        <p:txBody>
-          <a:bodyPr wrap="square" rtlCol="0" anchor="ctr"/>
-          <a:lstStyle/>
-          <a:p>
-            <a:pPr algn="ctr" indent="0" marL="0">
-              <a:buNone/>
-            </a:pPr>
-            <a:r>
-              <a:rPr lang="en-US" sz="1200" i="1" dirty="0">
-                <a:solidFill>
-                  <a:srgbClr val="6B7280"/>
-                </a:solidFill>
-                <a:latin typeface="Calibri" pitchFamily="34" charset="0"/>
-                <a:ea typeface="Calibri" pitchFamily="34" charset="-122"/>
-                <a:cs typeface="Calibri" pitchFamily="34" charset="-120"/>
-              </a:rPr>
-              <a:t>Figuur 20.1</a:t>
-            </a:r>
-            <a:endParaRPr lang="en-US" sz="1200" dirty="0"/>
-          </a:p>
-        </p:txBody>
-      </p:sp>
-      <p:sp>
-        <p:nvSpPr>
-          <p:cNvPr id="5" name="Shape 2"/>
-          <p:cNvSpPr/>
-          <p:nvPr/>
-        </p:nvSpPr>
-        <p:spPr>
-          <a:xfrm>
-            <a:off x="0" y="6172200"/>
-            <a:ext cx="12188952" cy="685800"/>
-          </a:xfrm>
-          <a:prstGeom prst="rect">
-            <a:avLst/>
+      <p:sp>
+        <p:nvSpPr>
+          <p:cNvPr id="3" name="Shape 1"/>
+          <p:cNvSpPr/>
+          <p:nvPr/>
+        </p:nvSpPr>
+        <p:spPr>
+          <a:xfrm>
+            <a:off x="822960" y="1371600"/>
+            <a:ext cx="10515600" cy="4206240"/>
+          </a:xfrm>
+          <a:prstGeom prst="roundRect">
+            <a:avLst>
+              <a:gd name="adj" fmla="val 1304"/>
+            </a:avLst>
           </a:prstGeom>
           <a:solidFill>
             <a:srgbClr val="EEF1F6"/>
           </a:solidFill>
-          <a:ln/>
-        </p:spPr>
-      </p:sp>
-      <p:sp>
-        <p:nvSpPr>
-          <p:cNvPr id="6" name="Text 3"/>
+          <a:ln w="12700">
+            <a:solidFill>
+              <a:srgbClr val="D7DCE5"/>
+            </a:solidFill>
+            <a:prstDash val="solid"/>
+          </a:ln>
+        </p:spPr>
+      </p:sp>
+      <p:sp>
+        <p:nvSpPr>
+          <p:cNvPr id="4" name="Text 2"/>
+          <p:cNvSpPr/>
+          <p:nvPr/>
+        </p:nvSpPr>
+        <p:spPr>
+          <a:xfrm>
+            <a:off x="1188720" y="1645920"/>
+            <a:ext cx="2743200" cy="365760"/>
+          </a:xfrm>
+          <a:prstGeom prst="rect">
+            <a:avLst/>
+          </a:prstGeom>
+          <a:noFill/>
+          <a:ln/>
+        </p:spPr>
+        <p:txBody>
+          <a:bodyPr wrap="square" rtlCol="0" anchor="ctr"/>
+          <a:lstStyle/>
+          <a:p>
+            <a:pPr indent="0" marL="0">
+              <a:buNone/>
+            </a:pPr>
+            <a:r>
+              <a:rPr lang="en-US" sz="1200" b="1" spc="200" kern="0" dirty="0">
+                <a:solidFill>
+                  <a:srgbClr val="E9A13B"/>
+                </a:solidFill>
+                <a:latin typeface="Calibri" pitchFamily="34" charset="0"/>
+                <a:ea typeface="Calibri" pitchFamily="34" charset="-122"/>
+                <a:cs typeface="Calibri" pitchFamily="34" charset="-120"/>
+              </a:rPr>
+              <a:t>BEELD</a:t>
+            </a:r>
+            <a:endParaRPr lang="en-US" sz="1200" dirty="0"/>
+          </a:p>
+        </p:txBody>
+      </p:sp>
+      <p:sp>
+        <p:nvSpPr>
+          <p:cNvPr id="5" name="Text 3"/>
+          <p:cNvSpPr/>
+          <p:nvPr/>
+        </p:nvSpPr>
+        <p:spPr>
+          <a:xfrm>
+            <a:off x="1188720" y="2103120"/>
+            <a:ext cx="9784080" cy="3200400"/>
+          </a:xfrm>
+          <a:prstGeom prst="rect">
+            <a:avLst/>
+          </a:prstGeom>
+          <a:noFill/>
+          <a:ln/>
+        </p:spPr>
+        <p:txBody>
+          <a:bodyPr wrap="square" rtlCol="0" anchor="t"/>
+          <a:lstStyle/>
+          <a:p>
+            <a:pPr indent="0" marL="0">
+              <a:buNone/>
+            </a:pPr>
+            <a:r>
+              <a:rPr lang="en-US" sz="1800" i="1" dirty="0">
+                <a:solidFill>
+                  <a:srgbClr val="14213D"/>
+                </a:solidFill>
+                <a:latin typeface="Calibri" pitchFamily="34" charset="0"/>
+                <a:ea typeface="Calibri" pitchFamily="34" charset="-122"/>
+                <a:cs typeface="Calibri" pitchFamily="34" charset="-120"/>
+              </a:rPr>
+              <a:t>Schermafbeelding van het startscherm</a:t>
+            </a:r>
+            <a:endParaRPr lang="en-US" sz="1800" dirty="0"/>
+          </a:p>
+        </p:txBody>
+      </p:sp>
+      <p:sp>
+        <p:nvSpPr>
+          <p:cNvPr id="6" name="Shape 4"/>
+          <p:cNvSpPr/>
+          <p:nvPr/>
+        </p:nvSpPr>
+        <p:spPr>
+          <a:xfrm>
+            <a:off x="0" y="6172200"/>
+            <a:ext cx="12188952" cy="685800"/>
+          </a:xfrm>
+          <a:prstGeom prst="rect">
+            <a:avLst/>
+          </a:prstGeom>
+          <a:solidFill>
+            <a:srgbClr val="EEF1F6"/>
+          </a:solidFill>
+          <a:ln/>
+        </p:spPr>
+      </p:sp>
+      <p:sp>
+        <p:nvSpPr>
+          <p:cNvPr id="7" name="Text 5"/>
           <p:cNvSpPr/>
           <p:nvPr/>
         </p:nvSpPr>
@@ -6015,7 +6339,7 @@
                 <a:ea typeface="Calibri" pitchFamily="34" charset="-122"/>
                 <a:cs typeface="Calibri" pitchFamily="34" charset="-120"/>
               </a:rPr>
-              <a:t>Spreeknotitie: Vandaag uitsluitend conformance checking.</a:t>
+              <a:t>Spreeknotitie: 10 minuten begeleid, net als bij de eerste modelleeromgeving in dit programma.</a:t>
             </a:r>
             <a:endParaRPr lang="en-US" sz="1050" dirty="0"/>
           </a:p>
@@ -6086,7 +6410,7 @@
                 <a:ea typeface="Calibri" pitchFamily="34" charset="-122"/>
                 <a:cs typeface="Calibri" pitchFamily="34" charset="-120"/>
               </a:rPr>
-              <a:t>Case-ID · activiteit · tijdstempel</a:t>
+              <a:t>Discovery · conformance checking · enhancement</a:t>
             </a:r>
             <a:endParaRPr lang="en-US" sz="2400" dirty="0"/>
           </a:p>
@@ -6094,7 +6418,7 @@
       </p:sp>
       <p:pic>
         <p:nvPicPr>
-          <p:cNvPr id="3" name="Image 0" descr="C:\Projecten\eductus-trainingen\CMMN_BPMN_DMN\cursus-bpmn-cmmn-dmn\build\png\deel-20\figuur-20-2-anatomie-event-log.png">    </p:cNvPr>
+          <p:cNvPr id="3" name="Image 0" descr="C:\Projecten\eductus-trainingen\CMMN_BPMN_DMN\cursus-bpmn-cmmn-dmn\build\png\deel-20\figuur-20-1-drie-soorten-mining.png">    </p:cNvPr>
           <p:cNvPicPr>
             <a:picLocks noChangeAspect="1"/>
           </p:cNvPicPr>
@@ -6108,8 +6432,8 @@
         </p:blipFill>
         <p:spPr>
           <a:xfrm>
-            <a:off x="2420547" y="1234440"/>
-            <a:ext cx="7347857" cy="4114800"/>
+            <a:off x="2162556" y="1234440"/>
+            <a:ext cx="7863840" cy="4079367"/>
           </a:xfrm>
           <a:prstGeom prst="rect">
             <a:avLst/>
@@ -6124,7 +6448,7 @@
         </p:nvSpPr>
         <p:spPr>
           <a:xfrm>
-            <a:off x="731520" y="5440680"/>
+            <a:off x="731520" y="5405247"/>
             <a:ext cx="10698480" cy="457200"/>
           </a:xfrm>
           <a:prstGeom prst="rect">
@@ -6149,7 +6473,7 @@
                 <a:ea typeface="Calibri" pitchFamily="34" charset="-122"/>
                 <a:cs typeface="Calibri" pitchFamily="34" charset="-120"/>
               </a:rPr>
-              <a:t>Figuur 20.2</a:t>
+              <a:t>Figuur 20.1</a:t>
             </a:r>
             <a:endParaRPr lang="en-US" sz="1200" dirty="0"/>
           </a:p>
@@ -6208,7 +6532,7 @@
                 <a:ea typeface="Calibri" pitchFamily="34" charset="-122"/>
                 <a:cs typeface="Calibri" pitchFamily="34" charset="-120"/>
               </a:rPr>
-              <a:t>Spreeknotitie: Drie verplichte kolommen, de rest is aanvullend.</a:t>
+              <a:t>Spreeknotitie: Vandaag uitsluitend conformance checking.</a:t>
             </a:r>
             <a:endParaRPr lang="en-US" sz="1050" dirty="0"/>
           </a:p>
@@ -6279,7 +6603,7 @@
                 <a:ea typeface="Calibri" pitchFamily="34" charset="-122"/>
                 <a:cs typeface="Calibri" pitchFamily="34" charset="-120"/>
               </a:rPr>
-              <a:t>Ontbrekende events · onjuiste tijdstempels · naamgevingsverschillen · grensoverschrijdende cases</a:t>
+              <a:t>Case-ID · activiteit · tijdstempel</a:t>
             </a:r>
             <a:endParaRPr lang="en-US" sz="2400" dirty="0"/>
           </a:p>
@@ -6287,7 +6611,7 @@
       </p:sp>
       <p:pic>
         <p:nvPicPr>
-          <p:cNvPr id="3" name="Image 0" descr="C:\Projecten\eductus-trainingen\CMMN_BPMN_DMN\cursus-bpmn-cmmn-dmn\build\png\deel-20\figuur-20-3-logkwaliteitsproblemen.png">    </p:cNvPr>
+          <p:cNvPr id="3" name="Image 0" descr="C:\Projecten\eductus-trainingen\CMMN_BPMN_DMN\cursus-bpmn-cmmn-dmn\build\png\deel-20\figuur-20-2-anatomie-event-log.png">    </p:cNvPr>
           <p:cNvPicPr>
             <a:picLocks noChangeAspect="1"/>
           </p:cNvPicPr>
@@ -6301,8 +6625,8 @@
         </p:blipFill>
         <p:spPr>
           <a:xfrm>
-            <a:off x="2802636" y="1234440"/>
-            <a:ext cx="6583680" cy="4114800"/>
+            <a:off x="2420547" y="1234440"/>
+            <a:ext cx="7347857" cy="4114800"/>
           </a:xfrm>
           <a:prstGeom prst="rect">
             <a:avLst/>
@@ -6342,7 +6666,7 @@
                 <a:ea typeface="Calibri" pitchFamily="34" charset="-122"/>
                 <a:cs typeface="Calibri" pitchFamily="34" charset="-120"/>
               </a:rPr>
-              <a:t>Figuur 20.3</a:t>
+              <a:t>Figuur 20.2</a:t>
             </a:r>
             <a:endParaRPr lang="en-US" sz="1200" dirty="0"/>
           </a:p>
@@ -6401,7 +6725,7 @@
                 <a:ea typeface="Calibri" pitchFamily="34" charset="-122"/>
                 <a:cs typeface="Calibri" pitchFamily="34" charset="-120"/>
               </a:rPr>
-              <a:t>Spreeknotitie: Dit controleer je vóórdat je iets concludeert.</a:t>
+              <a:t>Spreeknotitie: Drie verplichte kolommen, de rest is aanvullend.</a:t>
             </a:r>
             <a:endParaRPr lang="en-US" sz="1050" dirty="0"/>
           </a:p>
@@ -6472,140 +6796,98 @@
                 <a:ea typeface="Calibri" pitchFamily="34" charset="-122"/>
                 <a:cs typeface="Calibri" pitchFamily="34" charset="-120"/>
               </a:rPr>
-              <a:t>Precieze getallen uit slechte data</a:t>
+              <a:t>Ontbrekende events · onjuiste tijdstempels · naamgevingsverschillen · grensoverschrijdende cases</a:t>
             </a:r>
             <a:endParaRPr lang="en-US" sz="2400" dirty="0"/>
           </a:p>
         </p:txBody>
       </p:sp>
-      <p:sp>
-        <p:nvSpPr>
-          <p:cNvPr id="3" name="Shape 1"/>
-          <p:cNvSpPr/>
-          <p:nvPr/>
-        </p:nvSpPr>
-        <p:spPr>
-          <a:xfrm>
-            <a:off x="822960" y="1371600"/>
-            <a:ext cx="10515600" cy="4206240"/>
-          </a:xfrm>
-          <a:prstGeom prst="roundRect">
-            <a:avLst>
-              <a:gd name="adj" fmla="val 1304"/>
-            </a:avLst>
+      <p:pic>
+        <p:nvPicPr>
+          <p:cNvPr id="3" name="Image 0" descr="C:\Projecten\eductus-trainingen\CMMN_BPMN_DMN\cursus-bpmn-cmmn-dmn\build\png\deel-20\figuur-20-3-logkwaliteitsproblemen.png">    </p:cNvPr>
+          <p:cNvPicPr>
+            <a:picLocks noChangeAspect="1"/>
+          </p:cNvPicPr>
+          <p:nvPr/>
+        </p:nvPicPr>
+        <p:blipFill>
+          <a:blip r:embed="rId1"/>
+          <a:stretch>
+            <a:fillRect/>
+          </a:stretch>
+        </p:blipFill>
+        <p:spPr>
+          <a:xfrm>
+            <a:off x="2802636" y="1234440"/>
+            <a:ext cx="6583680" cy="4114800"/>
+          </a:xfrm>
+          <a:prstGeom prst="rect">
+            <a:avLst/>
+          </a:prstGeom>
+        </p:spPr>
+      </p:pic>
+      <p:sp>
+        <p:nvSpPr>
+          <p:cNvPr id="4" name="Text 1"/>
+          <p:cNvSpPr/>
+          <p:nvPr/>
+        </p:nvSpPr>
+        <p:spPr>
+          <a:xfrm>
+            <a:off x="731520" y="5440680"/>
+            <a:ext cx="10698480" cy="457200"/>
+          </a:xfrm>
+          <a:prstGeom prst="rect">
+            <a:avLst/>
+          </a:prstGeom>
+          <a:noFill/>
+          <a:ln/>
+        </p:spPr>
+        <p:txBody>
+          <a:bodyPr wrap="square" rtlCol="0" anchor="ctr"/>
+          <a:lstStyle/>
+          <a:p>
+            <a:pPr algn="ctr" indent="0" marL="0">
+              <a:buNone/>
+            </a:pPr>
+            <a:r>
+              <a:rPr lang="en-US" sz="1200" i="1" dirty="0">
+                <a:solidFill>
+                  <a:srgbClr val="6B7280"/>
+                </a:solidFill>
+                <a:latin typeface="Calibri" pitchFamily="34" charset="0"/>
+                <a:ea typeface="Calibri" pitchFamily="34" charset="-122"/>
+                <a:cs typeface="Calibri" pitchFamily="34" charset="-120"/>
+              </a:rPr>
+              <a:t>Figuur 20.3</a:t>
+            </a:r>
+            <a:endParaRPr lang="en-US" sz="1200" dirty="0"/>
+          </a:p>
+        </p:txBody>
+      </p:sp>
+      <p:sp>
+        <p:nvSpPr>
+          <p:cNvPr id="5" name="Shape 2"/>
+          <p:cNvSpPr/>
+          <p:nvPr/>
+        </p:nvSpPr>
+        <p:spPr>
+          <a:xfrm>
+            <a:off x="0" y="6172200"/>
+            <a:ext cx="12188952" cy="685800"/>
+          </a:xfrm>
+          <a:prstGeom prst="rect">
+            <a:avLst/>
           </a:prstGeom>
           <a:solidFill>
             <a:srgbClr val="EEF1F6"/>
           </a:solidFill>
-          <a:ln w="12700">
-            <a:solidFill>
-              <a:srgbClr val="D7DCE5"/>
-            </a:solidFill>
-            <a:prstDash val="solid"/>
-          </a:ln>
-        </p:spPr>
-      </p:sp>
-      <p:sp>
-        <p:nvSpPr>
-          <p:cNvPr id="4" name="Text 2"/>
-          <p:cNvSpPr/>
-          <p:nvPr/>
-        </p:nvSpPr>
-        <p:spPr>
-          <a:xfrm>
-            <a:off x="1188720" y="1645920"/>
-            <a:ext cx="2743200" cy="365760"/>
-          </a:xfrm>
-          <a:prstGeom prst="rect">
-            <a:avLst/>
-          </a:prstGeom>
-          <a:noFill/>
-          <a:ln/>
-        </p:spPr>
-        <p:txBody>
-          <a:bodyPr wrap="square" rtlCol="0" anchor="ctr"/>
-          <a:lstStyle/>
-          <a:p>
-            <a:pPr indent="0" marL="0">
-              <a:buNone/>
-            </a:pPr>
-            <a:r>
-              <a:rPr lang="en-US" sz="1200" b="1" spc="200" kern="0" dirty="0">
-                <a:solidFill>
-                  <a:srgbClr val="E9A13B"/>
-                </a:solidFill>
-                <a:latin typeface="Calibri" pitchFamily="34" charset="0"/>
-                <a:ea typeface="Calibri" pitchFamily="34" charset="-122"/>
-                <a:cs typeface="Calibri" pitchFamily="34" charset="-120"/>
-              </a:rPr>
-              <a:t>BEELD</a:t>
-            </a:r>
-            <a:endParaRPr lang="en-US" sz="1200" dirty="0"/>
-          </a:p>
-        </p:txBody>
-      </p:sp>
-      <p:sp>
-        <p:nvSpPr>
-          <p:cNvPr id="5" name="Text 3"/>
-          <p:cNvSpPr/>
-          <p:nvPr/>
-        </p:nvSpPr>
-        <p:spPr>
-          <a:xfrm>
-            <a:off x="1188720" y="2103120"/>
-            <a:ext cx="9784080" cy="3200400"/>
-          </a:xfrm>
-          <a:prstGeom prst="rect">
-            <a:avLst/>
-          </a:prstGeom>
-          <a:noFill/>
-          <a:ln/>
-        </p:spPr>
-        <p:txBody>
-          <a:bodyPr wrap="square" rtlCol="0" anchor="t"/>
-          <a:lstStyle/>
-          <a:p>
-            <a:pPr indent="0" marL="0">
-              <a:buNone/>
-            </a:pPr>
-            <a:r>
-              <a:rPr lang="en-US" sz="1800" i="1" dirty="0">
-                <a:solidFill>
-                  <a:srgbClr val="14213D"/>
-                </a:solidFill>
-                <a:latin typeface="Calibri" pitchFamily="34" charset="0"/>
-                <a:ea typeface="Calibri" pitchFamily="34" charset="-122"/>
-                <a:cs typeface="Calibri" pitchFamily="34" charset="-120"/>
-              </a:rPr>
-              <a:t>Eén tekstslide</a:t>
-            </a:r>
-            <a:endParaRPr lang="en-US" sz="1800" dirty="0"/>
-          </a:p>
-        </p:txBody>
-      </p:sp>
-      <p:sp>
-        <p:nvSpPr>
-          <p:cNvPr id="6" name="Shape 4"/>
-          <p:cNvSpPr/>
-          <p:nvPr/>
-        </p:nvSpPr>
-        <p:spPr>
-          <a:xfrm>
-            <a:off x="0" y="6172200"/>
-            <a:ext cx="12188952" cy="685800"/>
-          </a:xfrm>
-          <a:prstGeom prst="rect">
-            <a:avLst/>
-          </a:prstGeom>
-          <a:solidFill>
-            <a:srgbClr val="EEF1F6"/>
-          </a:solidFill>
-          <a:ln/>
-        </p:spPr>
-      </p:sp>
-      <p:sp>
-        <p:nvSpPr>
-          <p:cNvPr id="7" name="Text 5"/>
+          <a:ln/>
+        </p:spPr>
+      </p:sp>
+      <p:sp>
+        <p:nvSpPr>
+          <p:cNvPr id="6" name="Text 3"/>
           <p:cNvSpPr/>
           <p:nvPr/>
         </p:nvSpPr>
@@ -6636,7 +6918,7 @@
                 <a:ea typeface="Calibri" pitchFamily="34" charset="-122"/>
                 <a:cs typeface="Calibri" pitchFamily="34" charset="-120"/>
               </a:rPr>
-              <a:t>Spreeknotitie: De belangrijkste beroepsfout in dit vak — zet dit hard neer.</a:t>
+              <a:t>Spreeknotitie: Dit controleer je vóórdat je iets concludeert.</a:t>
             </a:r>
             <a:endParaRPr lang="en-US" sz="1050" dirty="0"/>
           </a:p>
@@ -6707,7 +6989,7 @@
                 <a:ea typeface="Calibri" pitchFamily="34" charset="-122"/>
                 <a:cs typeface="Calibri" pitchFamily="34" charset="-120"/>
               </a:rPr>
-              <a:t>Beoordeel een event log op vier ingebouwde problemen</a:t>
+              <a:t>Precieze getallen uit slechte data</a:t>
             </a:r>
             <a:endParaRPr lang="en-US" sz="2400" dirty="0"/>
           </a:p>
@@ -6812,7 +7094,7 @@
                 <a:ea typeface="Calibri" pitchFamily="34" charset="-122"/>
                 <a:cs typeface="Calibri" pitchFamily="34" charset="-120"/>
               </a:rPr>
-              <a:t>Werkboekverwijzing, timer 30 minuten</a:t>
+              <a:t>Eén tekstslide</a:t>
             </a:r>
             <a:endParaRPr lang="en-US" sz="1800" dirty="0"/>
           </a:p>
@@ -6871,7 +7153,7 @@
                 <a:ea typeface="Calibri" pitchFamily="34" charset="-122"/>
                 <a:cs typeface="Calibri" pitchFamily="34" charset="-120"/>
               </a:rPr>
-              <a:t>Spreeknotitie: Individueel, plenair nabespreken. Niet overslaan, ook niet bij tijdsdruk.</a:t>
+              <a:t>Spreeknotitie: De belangrijkste beroepsfout in dit vak — zet dit hard neer.</a:t>
             </a:r>
             <a:endParaRPr lang="en-US" sz="1050" dirty="0"/>
           </a:p>
@@ -6942,98 +7224,140 @@
                 <a:ea typeface="Calibri" pitchFamily="34" charset="-122"/>
                 <a:cs typeface="Calibri" pitchFamily="34" charset="-120"/>
               </a:rPr>
-              <a:t>Conformance checking</a:t>
+              <a:t>Beoordeel een event log op vier ingebouwde problemen</a:t>
             </a:r>
             <a:endParaRPr lang="en-US" sz="2400" dirty="0"/>
           </a:p>
         </p:txBody>
       </p:sp>
-      <p:pic>
-        <p:nvPicPr>
-          <p:cNvPr id="3" name="Image 0" descr="C:\Projecten\eductus-trainingen\CMMN_BPMN_DMN\cursus-bpmn-cmmn-dmn\build\png\deel-20\figuur-20-4-conformance-uitkomst.png">    </p:cNvPr>
-          <p:cNvPicPr>
-            <a:picLocks noChangeAspect="1"/>
-          </p:cNvPicPr>
-          <p:nvPr/>
-        </p:nvPicPr>
-        <p:blipFill>
-          <a:blip r:embed="rId1"/>
-          <a:stretch>
-            <a:fillRect/>
-          </a:stretch>
-        </p:blipFill>
-        <p:spPr>
-          <a:xfrm>
-            <a:off x="2566244" y="1234440"/>
-            <a:ext cx="7056463" cy="4114800"/>
-          </a:xfrm>
-          <a:prstGeom prst="rect">
-            <a:avLst/>
-          </a:prstGeom>
-        </p:spPr>
-      </p:pic>
-      <p:sp>
-        <p:nvSpPr>
-          <p:cNvPr id="4" name="Text 1"/>
-          <p:cNvSpPr/>
-          <p:nvPr/>
-        </p:nvSpPr>
-        <p:spPr>
-          <a:xfrm>
-            <a:off x="731520" y="5440680"/>
-            <a:ext cx="10698480" cy="457200"/>
-          </a:xfrm>
-          <a:prstGeom prst="rect">
-            <a:avLst/>
-          </a:prstGeom>
-          <a:noFill/>
-          <a:ln/>
-        </p:spPr>
-        <p:txBody>
-          <a:bodyPr wrap="square" rtlCol="0" anchor="ctr"/>
-          <a:lstStyle/>
-          <a:p>
-            <a:pPr algn="ctr" indent="0" marL="0">
-              <a:buNone/>
-            </a:pPr>
-            <a:r>
-              <a:rPr lang="en-US" sz="1200" i="1" dirty="0">
-                <a:solidFill>
-                  <a:srgbClr val="6B7280"/>
-                </a:solidFill>
-                <a:latin typeface="Calibri" pitchFamily="34" charset="0"/>
-                <a:ea typeface="Calibri" pitchFamily="34" charset="-122"/>
-                <a:cs typeface="Calibri" pitchFamily="34" charset="-120"/>
-              </a:rPr>
-              <a:t>leeg</a:t>
-            </a:r>
-            <a:endParaRPr lang="en-US" sz="1200" dirty="0"/>
-          </a:p>
-        </p:txBody>
-      </p:sp>
-      <p:sp>
-        <p:nvSpPr>
-          <p:cNvPr id="5" name="Shape 2"/>
-          <p:cNvSpPr/>
-          <p:nvPr/>
-        </p:nvSpPr>
-        <p:spPr>
-          <a:xfrm>
-            <a:off x="0" y="6172200"/>
-            <a:ext cx="12188952" cy="685800"/>
-          </a:xfrm>
-          <a:prstGeom prst="rect">
-            <a:avLst/>
+      <p:sp>
+        <p:nvSpPr>
+          <p:cNvPr id="3" name="Shape 1"/>
+          <p:cNvSpPr/>
+          <p:nvPr/>
+        </p:nvSpPr>
+        <p:spPr>
+          <a:xfrm>
+            <a:off x="822960" y="1371600"/>
+            <a:ext cx="10515600" cy="4206240"/>
+          </a:xfrm>
+          <a:prstGeom prst="roundRect">
+            <a:avLst>
+              <a:gd name="adj" fmla="val 1304"/>
+            </a:avLst>
           </a:prstGeom>
           <a:solidFill>
             <a:srgbClr val="EEF1F6"/>
           </a:solidFill>
-          <a:ln/>
-        </p:spPr>
-      </p:sp>
-      <p:sp>
-        <p:nvSpPr>
-          <p:cNvPr id="6" name="Text 3"/>
+          <a:ln w="12700">
+            <a:solidFill>
+              <a:srgbClr val="D7DCE5"/>
+            </a:solidFill>
+            <a:prstDash val="solid"/>
+          </a:ln>
+        </p:spPr>
+      </p:sp>
+      <p:sp>
+        <p:nvSpPr>
+          <p:cNvPr id="4" name="Text 2"/>
+          <p:cNvSpPr/>
+          <p:nvPr/>
+        </p:nvSpPr>
+        <p:spPr>
+          <a:xfrm>
+            <a:off x="1188720" y="1645920"/>
+            <a:ext cx="2743200" cy="365760"/>
+          </a:xfrm>
+          <a:prstGeom prst="rect">
+            <a:avLst/>
+          </a:prstGeom>
+          <a:noFill/>
+          <a:ln/>
+        </p:spPr>
+        <p:txBody>
+          <a:bodyPr wrap="square" rtlCol="0" anchor="ctr"/>
+          <a:lstStyle/>
+          <a:p>
+            <a:pPr indent="0" marL="0">
+              <a:buNone/>
+            </a:pPr>
+            <a:r>
+              <a:rPr lang="en-US" sz="1200" b="1" spc="200" kern="0" dirty="0">
+                <a:solidFill>
+                  <a:srgbClr val="E9A13B"/>
+                </a:solidFill>
+                <a:latin typeface="Calibri" pitchFamily="34" charset="0"/>
+                <a:ea typeface="Calibri" pitchFamily="34" charset="-122"/>
+                <a:cs typeface="Calibri" pitchFamily="34" charset="-120"/>
+              </a:rPr>
+              <a:t>BEELD</a:t>
+            </a:r>
+            <a:endParaRPr lang="en-US" sz="1200" dirty="0"/>
+          </a:p>
+        </p:txBody>
+      </p:sp>
+      <p:sp>
+        <p:nvSpPr>
+          <p:cNvPr id="5" name="Text 3"/>
+          <p:cNvSpPr/>
+          <p:nvPr/>
+        </p:nvSpPr>
+        <p:spPr>
+          <a:xfrm>
+            <a:off x="1188720" y="2103120"/>
+            <a:ext cx="9784080" cy="3200400"/>
+          </a:xfrm>
+          <a:prstGeom prst="rect">
+            <a:avLst/>
+          </a:prstGeom>
+          <a:noFill/>
+          <a:ln/>
+        </p:spPr>
+        <p:txBody>
+          <a:bodyPr wrap="square" rtlCol="0" anchor="t"/>
+          <a:lstStyle/>
+          <a:p>
+            <a:pPr indent="0" marL="0">
+              <a:buNone/>
+            </a:pPr>
+            <a:r>
+              <a:rPr lang="en-US" sz="1800" i="1" dirty="0">
+                <a:solidFill>
+                  <a:srgbClr val="14213D"/>
+                </a:solidFill>
+                <a:latin typeface="Calibri" pitchFamily="34" charset="0"/>
+                <a:ea typeface="Calibri" pitchFamily="34" charset="-122"/>
+                <a:cs typeface="Calibri" pitchFamily="34" charset="-120"/>
+              </a:rPr>
+              <a:t>Werkboekverwijzing, timer 30 minuten</a:t>
+            </a:r>
+            <a:endParaRPr lang="en-US" sz="1800" dirty="0"/>
+          </a:p>
+        </p:txBody>
+      </p:sp>
+      <p:sp>
+        <p:nvSpPr>
+          <p:cNvPr id="6" name="Shape 4"/>
+          <p:cNvSpPr/>
+          <p:nvPr/>
+        </p:nvSpPr>
+        <p:spPr>
+          <a:xfrm>
+            <a:off x="0" y="6172200"/>
+            <a:ext cx="12188952" cy="685800"/>
+          </a:xfrm>
+          <a:prstGeom prst="rect">
+            <a:avLst/>
+          </a:prstGeom>
+          <a:solidFill>
+            <a:srgbClr val="EEF1F6"/>
+          </a:solidFill>
+          <a:ln/>
+        </p:spPr>
+      </p:sp>
+      <p:sp>
+        <p:nvSpPr>
+          <p:cNvPr id="7" name="Text 5"/>
           <p:cNvSpPr/>
           <p:nvPr/>
         </p:nvSpPr>
@@ -7064,7 +7388,7 @@
                 <a:ea typeface="Calibri" pitchFamily="34" charset="-122"/>
                 <a:cs typeface="Calibri" pitchFamily="34" charset="-120"/>
               </a:rPr>
-              <a:t>Spreeknotitie: Introductie.</a:t>
+              <a:t>Spreeknotitie: Individueel, plenair nabespreken. Niet overslaan, ook niet bij tijdsdruk.</a:t>
             </a:r>
             <a:endParaRPr lang="en-US" sz="1050" dirty="0"/>
           </a:p>
